--- a/docs/KICT_Bmaps_연계가치_7p.pptx
+++ b/docs/KICT_Bmaps_연계가치_7p.pptx
@@ -9138,45 +9138,21 @@
                 <a:ea typeface="Paperlogy 7 Bold"/>
                 <a:cs typeface="Paperlogy 7 Bold"/>
               </a:rPr>
-              <a:t>지금 낸 것은 '높은 R²' 가 아니라 '높은 R² 를 믿으면 안 되는 이유'다</a:t>
-            </a:r>
-          </a:p>
-        </p:txBody>
-      </p:sp>
-      <p:pic>
-        <p:nvPicPr>
-          <p:cNvPr id="11" name="Picture 10" descr="연주기_점별상관_분포.png"/>
-          <p:cNvPicPr>
-            <a:picLocks noChangeAspect="1"/>
-          </p:cNvPicPr>
-          <p:nvPr/>
-        </p:nvPicPr>
-        <p:blipFill>
-          <a:blip r:embed="rId2"/>
-          <a:stretch>
-            <a:fillRect/>
-          </a:stretch>
-        </p:blipFill>
-        <p:spPr>
-          <a:xfrm>
-            <a:off x="716952" y="1243584"/>
-            <a:ext cx="6795697" cy="3456432"/>
-          </a:xfrm>
-          <a:prstGeom prst="rect">
-            <a:avLst/>
-          </a:prstGeom>
-        </p:spPr>
-      </p:pic>
-      <p:sp>
-        <p:nvSpPr>
-          <p:cNvPr id="12" name="Rectangle 11"/>
+              <a:t>교면 점만 남기고 지반 성분까지 뺐다 — 그래도 계절이 어긋난다</a:t>
+            </a:r>
+          </a:p>
+        </p:txBody>
+      </p:sp>
+      <p:sp>
+        <p:nvSpPr>
+          <p:cNvPr id="11" name="Rectangle 10"/>
           <p:cNvSpPr/>
           <p:nvPr/>
         </p:nvSpPr>
         <p:spPr>
           <a:xfrm>
-            <a:off x="8001000" y="1243584"/>
-            <a:ext cx="3779215" cy="3456432"/>
+            <a:off x="411480" y="1170432"/>
+            <a:ext cx="11368735" cy="2889504"/>
           </a:xfrm>
           <a:prstGeom prst="rect">
             <a:avLst/>
@@ -9213,6 +9189,30 @@
           </a:p>
         </p:txBody>
       </p:sp>
+      <p:pic>
+        <p:nvPicPr>
+          <p:cNvPr id="12" name="Picture 11" descr="교면전용_GNSS대조.png"/>
+          <p:cNvPicPr>
+            <a:picLocks noChangeAspect="1"/>
+          </p:cNvPicPr>
+          <p:nvPr/>
+        </p:nvPicPr>
+        <p:blipFill>
+          <a:blip r:embed="rId2"/>
+          <a:stretch>
+            <a:fillRect/>
+          </a:stretch>
+        </p:blipFill>
+        <p:spPr>
+          <a:xfrm>
+            <a:off x="1610835" y="1216152"/>
+            <a:ext cx="8970025" cy="2798064"/>
+          </a:xfrm>
+          <a:prstGeom prst="rect">
+            <a:avLst/>
+          </a:prstGeom>
+        </p:spPr>
+      </p:pic>
       <p:sp>
         <p:nvSpPr>
           <p:cNvPr id="13" name="Rectangle 12"/>
@@ -9221,7 +9221,53 @@
         </p:nvSpPr>
         <p:spPr>
           <a:xfrm>
-            <a:off x="8951062" y="1101852"/>
+            <a:off x="411480" y="4224528"/>
+            <a:ext cx="11368735" cy="1188720"/>
+          </a:xfrm>
+          <a:prstGeom prst="rect">
+            <a:avLst/>
+          </a:prstGeom>
+          <a:solidFill>
+            <a:srgbClr val="FFFFFF"/>
+          </a:solidFill>
+          <a:ln w="12700">
+            <a:solidFill>
+              <a:srgbClr val="E9EBEE"/>
+            </a:solidFill>
+          </a:ln>
+          <a:effectLst/>
+        </p:spPr>
+        <p:style>
+          <a:lnRef idx="1">
+            <a:schemeClr val="accent1"/>
+          </a:lnRef>
+          <a:fillRef idx="3">
+            <a:schemeClr val="accent1"/>
+          </a:fillRef>
+          <a:effectRef idx="2">
+            <a:schemeClr val="accent1"/>
+          </a:effectRef>
+          <a:fontRef idx="minor">
+            <a:schemeClr val="lt1"/>
+          </a:fontRef>
+        </p:style>
+        <p:txBody>
+          <a:bodyPr rtlCol="0" anchor="ctr"/>
+          <a:lstStyle/>
+          <a:p>
+            <a:pPr algn="ctr"/>
+          </a:p>
+        </p:txBody>
+      </p:sp>
+      <p:sp>
+        <p:nvSpPr>
+          <p:cNvPr id="14" name="Rectangle 13"/>
+          <p:cNvSpPr/>
+          <p:nvPr/>
+        </p:nvSpPr>
+        <p:spPr>
+          <a:xfrm>
+            <a:off x="5156302" y="4082796"/>
             <a:ext cx="1879092" cy="283464"/>
           </a:xfrm>
           <a:prstGeom prst="rect">
@@ -9259,13 +9305,13 @@
       </p:sp>
       <p:sp>
         <p:nvSpPr>
-          <p:cNvPr id="14" name="TextBox 13"/>
-          <p:cNvSpPr txBox="1"/>
-          <p:nvPr/>
-        </p:nvSpPr>
-        <p:spPr>
-          <a:xfrm>
-            <a:off x="8951062" y="1101852"/>
+          <p:cNvPr id="15" name="TextBox 14"/>
+          <p:cNvSpPr txBox="1"/>
+          <p:nvPr/>
+        </p:nvSpPr>
+        <p:spPr>
+          <a:xfrm>
+            <a:off x="5156302" y="4082796"/>
             <a:ext cx="1879092" cy="283464"/>
           </a:xfrm>
           <a:prstGeom prst="rect">
@@ -9300,14 +9346,14 @@
       </p:sp>
       <p:sp>
         <p:nvSpPr>
-          <p:cNvPr id="15" name="TextBox 14"/>
-          <p:cNvSpPr txBox="1"/>
-          <p:nvPr/>
-        </p:nvSpPr>
-        <p:spPr>
-          <a:xfrm>
-            <a:off x="8202168" y="1554480"/>
-            <a:ext cx="3376879" cy="3017520"/>
+          <p:cNvPr id="16" name="TextBox 15"/>
+          <p:cNvSpPr txBox="1"/>
+          <p:nvPr/>
+        </p:nvSpPr>
+        <p:spPr>
+          <a:xfrm>
+            <a:off x="658368" y="4517136"/>
+            <a:ext cx="5208880" cy="1097280"/>
           </a:xfrm>
           <a:prstGeom prst="rect">
             <a:avLst/>
@@ -9322,7 +9368,7 @@
           <a:p>
             <a:pPr algn="l">
               <a:lnSpc>
-                <a:spcPct val="130000"/>
+                <a:spcPct val="134000"/>
               </a:lnSpc>
             </a:pPr>
             <a:r>
@@ -9345,7 +9391,7 @@
                 <a:ea typeface="Paperlogy 7 Bold"/>
                 <a:cs typeface="Paperlogy 7 Bold"/>
               </a:rPr>
-              <a:t>월별 R² </a:t>
+              <a:t>한 것 </a:t>
             </a:r>
             <a:r>
               <a:rPr sz="1019" b="0">
@@ -9356,13 +9402,13 @@
                 <a:ea typeface="Paperlogy 5 Medium"/>
                 <a:cs typeface="Paperlogy 5 Medium"/>
               </a:rPr>
-              <a:t>0.13 ~ 0.88 (교량 6개소)</a:t>
+              <a:t>① 코히런스로 지오로케이션 밀림 되돌리기 ② 회랑을 ±30 m 에서 ±폭/2 로 ③ 100~400 m 밖 지반 공통성분 빼기</a:t>
             </a:r>
           </a:p>
           <a:p>
             <a:pPr algn="l">
               <a:lnSpc>
-                <a:spcPct val="130000"/>
+                <a:spcPct val="134000"/>
               </a:lnSpc>
             </a:pPr>
             <a:r>
@@ -9385,7 +9431,7 @@
                 <a:ea typeface="Paperlogy 7 Bold"/>
                 <a:cs typeface="Paperlogy 7 Bold"/>
               </a:rPr>
-              <a:t>우연 기준선을 넘은 칸 </a:t>
+              <a:t>연주기 위상 </a:t>
             </a:r>
             <a:r>
               <a:rPr sz="1019" b="0">
@@ -9396,13 +9442,36 @@
                 <a:ea typeface="Paperlogy 5 Medium"/>
                 <a:cs typeface="Paperlogy 5 Medium"/>
               </a:rPr>
-              <a:t>0/24 — 평활·누적·연주기로 숫자를 올려도 우연 기준선이 같이 오른다</a:t>
-            </a:r>
-          </a:p>
+              <a:t>1.3 ~ 5.8개월 어긋남 · 같은 계절 거동 1/5개소</a:t>
+            </a:r>
+          </a:p>
+        </p:txBody>
+      </p:sp>
+      <p:sp>
+        <p:nvSpPr>
+          <p:cNvPr id="17" name="TextBox 16"/>
+          <p:cNvSpPr txBox="1"/>
+          <p:nvPr/>
+        </p:nvSpPr>
+        <p:spPr>
+          <a:xfrm>
+            <a:off x="6095848" y="4517136"/>
+            <a:ext cx="5208880" cy="1097280"/>
+          </a:xfrm>
+          <a:prstGeom prst="rect">
+            <a:avLst/>
+          </a:prstGeom>
+          <a:noFill/>
+        </p:spPr>
+        <p:txBody>
+          <a:bodyPr wrap="square" anchor="t" lIns="0" rIns="0" tIns="0" bIns="0">
+            <a:spAutoFit/>
+          </a:bodyPr>
+          <a:lstStyle/>
           <a:p>
             <a:pPr algn="l">
               <a:lnSpc>
-                <a:spcPct val="130000"/>
+                <a:spcPct val="134000"/>
               </a:lnSpc>
             </a:pPr>
             <a:r>
@@ -9425,7 +9494,7 @@
                 <a:ea typeface="Paperlogy 7 Bold"/>
                 <a:cs typeface="Paperlogy 7 Bold"/>
               </a:rPr>
-              <a:t>가장 중요한 발견 </a:t>
+              <a:t>근본 원인 </a:t>
             </a:r>
             <a:r>
               <a:rPr sz="1019" b="0">
@@ -9436,13 +9505,13 @@
                 <a:ea typeface="Paperlogy 5 Medium"/>
                 <a:cs typeface="Paperlogy 5 Medium"/>
               </a:rPr>
-              <a:t>한 교량 안에 r 이 +1 에 가까운 점과 -1 에 가까운 점이 둘 다 있다. 점들의 중앙값은 0 근처다</a:t>
+              <a:t>한강 15개소 중 11개소에서 교량 위 점의 계절 위상이 100~200 m 떨어진 맨땅과 1.5개월 안으로 같다</a:t>
             </a:r>
           </a:p>
           <a:p>
             <a:pPr algn="l">
               <a:lnSpc>
-                <a:spcPct val="130000"/>
+                <a:spcPct val="134000"/>
               </a:lnSpc>
             </a:pPr>
             <a:r>
@@ -9476,61 +9545,21 @@
                 <a:ea typeface="Paperlogy 5 Medium"/>
                 <a:cs typeface="Paperlogy 5 Medium"/>
               </a:rPr>
-              <a:t>'가장 닮은 점'을 고르는 순간 원하는 답이 나온다 — 4/6 이 정반대로 보였던 것도 교량이 아니라 고르기 때문이다</a:t>
-            </a:r>
-          </a:p>
-          <a:p>
-            <a:pPr algn="l">
-              <a:lnSpc>
-                <a:spcPct val="130000"/>
-              </a:lnSpc>
-            </a:pPr>
-            <a:r>
-              <a:rPr sz="1019" b="1">
-                <a:solidFill>
-                  <a:srgbClr val="1C5B8A"/>
-                </a:solidFill>
-                <a:latin typeface="Paperlogy 7 Bold"/>
-                <a:ea typeface="Paperlogy 7 Bold"/>
-                <a:cs typeface="Paperlogy 7 Bold"/>
-              </a:rPr>
-              <a:t>· </a:t>
-            </a:r>
-            <a:r>
-              <a:rPr sz="1019" b="1">
-                <a:solidFill>
-                  <a:srgbClr val="373D47"/>
-                </a:solidFill>
-                <a:latin typeface="Paperlogy 7 Bold"/>
-                <a:ea typeface="Paperlogy 7 Bold"/>
-                <a:cs typeface="Paperlogy 7 Bold"/>
-              </a:rPr>
-              <a:t>원인 </a:t>
-            </a:r>
-            <a:r>
-              <a:rPr sz="1019" b="0">
-                <a:solidFill>
-                  <a:srgbClr val="373D47"/>
-                </a:solidFill>
-                <a:latin typeface="Paperlogy 5 Medium"/>
-                <a:ea typeface="Paperlogy 5 Medium"/>
-                <a:cs typeface="Paperlogy 5 Medium"/>
-              </a:rPr>
-              <a:t>교면 PS 밀도(20,000점 중 20~237점) · 12일 관측을 월로 묶은 재표본 · 계측기 정확 위치 미제공</a:t>
-            </a:r>
-          </a:p>
-        </p:txBody>
-      </p:sp>
-      <p:sp>
-        <p:nvSpPr>
-          <p:cNvPr id="16" name="Rectangle 15"/>
+              <a:t>교면 점이 10~122개뿐이고 그마저 주변 지반과 섞여 있다 — 통계가 아니라 분해능 문제다</a:t>
+            </a:r>
+          </a:p>
+        </p:txBody>
+      </p:sp>
+      <p:sp>
+        <p:nvSpPr>
+          <p:cNvPr id="18" name="Rectangle 17"/>
           <p:cNvSpPr/>
           <p:nvPr/>
         </p:nvSpPr>
         <p:spPr>
           <a:xfrm>
-            <a:off x="411480" y="4864608"/>
-            <a:ext cx="11368735" cy="1024128"/>
+            <a:off x="411480" y="5504688"/>
+            <a:ext cx="11368735" cy="566928"/>
           </a:xfrm>
           <a:prstGeom prst="rect">
             <a:avLst/>
@@ -9538,10 +9567,8 @@
           <a:solidFill>
             <a:srgbClr val="EDF5F8"/>
           </a:solidFill>
-          <a:ln w="12700">
-            <a:solidFill>
-              <a:srgbClr val="E9EBEE"/>
-            </a:solidFill>
+          <a:ln>
+            <a:noFill/>
           </a:ln>
           <a:effectLst/>
         </p:spPr>
@@ -9569,14 +9596,14 @@
       </p:sp>
       <p:sp>
         <p:nvSpPr>
-          <p:cNvPr id="17" name="Rectangle 16"/>
+          <p:cNvPr id="19" name="Rectangle 18"/>
           <p:cNvSpPr/>
           <p:nvPr/>
         </p:nvSpPr>
         <p:spPr>
           <a:xfrm>
-            <a:off x="411480" y="4864608"/>
-            <a:ext cx="50292" cy="1024128"/>
+            <a:off x="411480" y="5504688"/>
+            <a:ext cx="50292" cy="566928"/>
           </a:xfrm>
           <a:prstGeom prst="rect">
             <a:avLst/>
@@ -9613,107 +9640,89 @@
       </p:sp>
       <p:sp>
         <p:nvSpPr>
-          <p:cNvPr id="18" name="TextBox 17"/>
-          <p:cNvSpPr txBox="1"/>
-          <p:nvPr/>
-        </p:nvSpPr>
-        <p:spPr>
-          <a:xfrm>
-            <a:off x="658368" y="4928616"/>
-            <a:ext cx="10874959" cy="914400"/>
-          </a:xfrm>
-          <a:prstGeom prst="rect">
-            <a:avLst/>
-          </a:prstGeom>
-          <a:noFill/>
-        </p:spPr>
-        <p:txBody>
-          <a:bodyPr wrap="square" anchor="t" lIns="0" rIns="0" tIns="0" bIns="0">
+          <p:cNvPr id="20" name="TextBox 19"/>
+          <p:cNvSpPr txBox="1"/>
+          <p:nvPr/>
+        </p:nvSpPr>
+        <p:spPr>
+          <a:xfrm>
+            <a:off x="658368" y="5504688"/>
+            <a:ext cx="10874959" cy="566928"/>
+          </a:xfrm>
+          <a:prstGeom prst="rect">
+            <a:avLst/>
+          </a:prstGeom>
+          <a:noFill/>
+        </p:spPr>
+        <p:txBody>
+          <a:bodyPr wrap="square" anchor="ctr" lIns="0" rIns="0" tIns="0" bIns="0">
             <a:spAutoFit/>
           </a:bodyPr>
           <a:lstStyle/>
           <a:p>
             <a:pPr algn="l">
               <a:lnSpc>
-                <a:spcPct val="130000"/>
+                <a:spcPct val="100000"/>
               </a:lnSpc>
             </a:pPr>
             <a:r>
               <a:rPr sz="1150" b="1">
                 <a:solidFill>
-                  <a:srgbClr val="1C5B8A"/>
+                  <a:srgbClr val="373D47"/>
                 </a:solidFill>
                 <a:latin typeface="Paperlogy 7 Bold"/>
                 <a:ea typeface="Paperlogy 7 Bold"/>
                 <a:cs typeface="Paperlogy 7 Bold"/>
               </a:rPr>
-              <a:t>숫자를 감추지 않는 이유</a:t>
-            </a:r>
-          </a:p>
+              <a:t>Sentinel-1 은 지상 5×20 m, 데크 폭은 1~2 화소다 — 지금 낸 것은 '맞는다' 가 아니라 '무엇이 있어야 맞출 수 있는가' 다</a:t>
+            </a:r>
+          </a:p>
+        </p:txBody>
+      </p:sp>
+      <p:sp>
+        <p:nvSpPr>
+          <p:cNvPr id="21" name="TextBox 20"/>
+          <p:cNvSpPr txBox="1"/>
+          <p:nvPr/>
+        </p:nvSpPr>
+        <p:spPr>
+          <a:xfrm>
+            <a:off x="411480" y="6355080"/>
+            <a:ext cx="11368735" cy="274320"/>
+          </a:xfrm>
+          <a:prstGeom prst="rect">
+            <a:avLst/>
+          </a:prstGeom>
+          <a:noFill/>
+        </p:spPr>
+        <p:txBody>
+          <a:bodyPr wrap="square" anchor="t" lIns="0" rIns="0" tIns="0" bIns="0">
+            <a:spAutoFit/>
+          </a:bodyPr>
+          <a:lstStyle/>
           <a:p>
             <a:pPr algn="l">
               <a:lnSpc>
-                <a:spcPct val="130000"/>
-              </a:lnSpc>
-            </a:pPr>
-            <a:r>
-              <a:rPr sz="1080" b="0">
-                <a:solidFill>
-                  <a:srgbClr val="373D47"/>
+                <a:spcPct val="118000"/>
+              </a:lnSpc>
+            </a:pPr>
+            <a:r>
+              <a:rPr sz="850" b="0">
+                <a:solidFill>
+                  <a:srgbClr val="6B7480"/>
                 </a:solidFill>
                 <a:latin typeface="Paperlogy 5 Medium"/>
                 <a:ea typeface="Paperlogy 5 Medium"/>
                 <a:cs typeface="Paperlogy 5 Medium"/>
               </a:rPr>
-              <a:t>정확도는 아직 낮다. 시스템이 완성되지 않았으니 당연한 결과다. 점을 골라 숫자를 만드는 함정을 먼저 막아 두는 체계 — 이게 있어야 다음에 올라간 숫자가 진짜인지 판별할 수 있다. 목적은 분명하다: 계측기 없는 교량에도 같은 판을 깔고, 검증 기준을 먼저 세워 두는 것.</a:t>
-            </a:r>
-          </a:p>
-        </p:txBody>
-      </p:sp>
-      <p:sp>
-        <p:nvSpPr>
-          <p:cNvPr id="19" name="TextBox 18"/>
-          <p:cNvSpPr txBox="1"/>
-          <p:nvPr/>
-        </p:nvSpPr>
-        <p:spPr>
-          <a:xfrm>
-            <a:off x="411480" y="6355080"/>
-            <a:ext cx="11368735" cy="274320"/>
-          </a:xfrm>
-          <a:prstGeom prst="rect">
-            <a:avLst/>
-          </a:prstGeom>
-          <a:noFill/>
-        </p:spPr>
-        <p:txBody>
-          <a:bodyPr wrap="square" anchor="t" lIns="0" rIns="0" tIns="0" bIns="0">
-            <a:spAutoFit/>
-          </a:bodyPr>
-          <a:lstStyle/>
-          <a:p>
-            <a:pPr algn="l">
-              <a:lnSpc>
-                <a:spcPct val="118000"/>
-              </a:lnSpc>
-            </a:pPr>
-            <a:r>
-              <a:rPr sz="850" b="0">
-                <a:solidFill>
-                  <a:srgbClr val="6B7480"/>
-                </a:solidFill>
-                <a:latin typeface="Paperlogy 5 Medium"/>
-                <a:ea typeface="Paperlogy 5 Medium"/>
-                <a:cs typeface="Paperlogy 5 Medium"/>
-              </a:rPr>
-              <a:t>※ 우연 기준선 = 위성 월값을 무작위로 섞어 같은 계산을 200회 돌린 값의 95 백분위. 다음 단계는 점을 고르지 않는 것 — 계측기 설치 위치를 받아 그 옆 점만 미리 정해 놓고 보면 이 함정이 사라진다. 원자료: 24년 한강온라인 최종보고(서울시·㈜유신·㈜일신이앤씨).</a:t>
-            </a:r>
-          </a:p>
-        </p:txBody>
-      </p:sp>
-      <p:sp>
-        <p:nvSpPr>
-          <p:cNvPr id="20" name="Rectangle 19"/>
+              <a:t>※ 오프셋은 평균 코히런스가 가장 높은 자리로 정했다 — GNSS 를 보지 않고 정하는 기준이라 '맞도록 고른' 값이 아니다. 판정 근거: scripts/make_deck_vs_ground.py · make_deck_fix.py · 교량별 교면전용.json. 원자료: 24년 한강온라인 최종보고(서울시·㈜유신·㈜일신이앤씨).</a:t>
+            </a:r>
+          </a:p>
+        </p:txBody>
+      </p:sp>
+      <p:sp>
+        <p:nvSpPr>
+          <p:cNvPr id="22" name="Rectangle 21"/>
           <p:cNvSpPr/>
           <p:nvPr/>
         </p:nvSpPr>
@@ -9757,7 +9766,7 @@
       </p:sp>
       <p:sp>
         <p:nvSpPr>
-          <p:cNvPr id="21" name="TextBox 20"/>
+          <p:cNvPr id="23" name="TextBox 22"/>
           <p:cNvSpPr txBox="1"/>
           <p:nvPr/>
         </p:nvSpPr>
@@ -9798,7 +9807,7 @@
       </p:sp>
       <p:sp>
         <p:nvSpPr>
-          <p:cNvPr id="22" name="Rectangle 21"/>
+          <p:cNvPr id="24" name="Rectangle 23"/>
           <p:cNvSpPr/>
           <p:nvPr/>
         </p:nvSpPr>
@@ -9842,7 +9851,7 @@
       </p:sp>
       <p:sp>
         <p:nvSpPr>
-          <p:cNvPr id="23" name="TextBox 22"/>
+          <p:cNvPr id="25" name="TextBox 24"/>
           <p:cNvSpPr txBox="1"/>
           <p:nvPr/>
         </p:nvSpPr>
@@ -10336,7 +10345,7 @@
         <p:spPr>
           <a:xfrm>
             <a:off x="493776" y="1243584"/>
-            <a:ext cx="1146468" cy="310896"/>
+            <a:ext cx="1041038" cy="310896"/>
           </a:xfrm>
           <a:prstGeom prst="rect">
             <a:avLst/>
@@ -10355,7 +10364,7 @@
               </a:lnSpc>
             </a:pPr>
             <a:r>
-              <a:rPr sz="980" b="1">
+              <a:rPr sz="940" b="1">
                 <a:solidFill>
                   <a:srgbClr val="FFFFFF"/>
                 </a:solidFill>
@@ -10376,8 +10385,8 @@
         </p:nvSpPr>
         <p:spPr>
           <a:xfrm>
-            <a:off x="1804836" y="1243584"/>
-            <a:ext cx="660890" cy="310896"/>
+            <a:off x="1699406" y="1243584"/>
+            <a:ext cx="607011" cy="310896"/>
           </a:xfrm>
           <a:prstGeom prst="rect">
             <a:avLst/>
@@ -10396,7 +10405,7 @@
               </a:lnSpc>
             </a:pPr>
             <a:r>
-              <a:rPr sz="980" b="1">
+              <a:rPr sz="940" b="1">
                 <a:solidFill>
                   <a:srgbClr val="FFFFFF"/>
                 </a:solidFill>
@@ -10417,8 +10426,8 @@
         </p:nvSpPr>
         <p:spPr>
           <a:xfrm>
-            <a:off x="2630319" y="1243584"/>
-            <a:ext cx="660890" cy="310896"/>
+            <a:off x="2471009" y="1243584"/>
+            <a:ext cx="607011" cy="310896"/>
           </a:xfrm>
           <a:prstGeom prst="rect">
             <a:avLst/>
@@ -10437,7 +10446,7 @@
               </a:lnSpc>
             </a:pPr>
             <a:r>
-              <a:rPr sz="980" b="1">
+              <a:rPr sz="940" b="1">
                 <a:solidFill>
                   <a:srgbClr val="FFFFFF"/>
                 </a:solidFill>
@@ -10458,8 +10467,8 @@
         </p:nvSpPr>
         <p:spPr>
           <a:xfrm>
-            <a:off x="3455801" y="1243584"/>
-            <a:ext cx="418102" cy="310896"/>
+            <a:off x="3242613" y="1243584"/>
+            <a:ext cx="558786" cy="310896"/>
           </a:xfrm>
           <a:prstGeom prst="rect">
             <a:avLst/>
@@ -10478,7 +10487,7 @@
               </a:lnSpc>
             </a:pPr>
             <a:r>
-              <a:rPr sz="980" b="1">
+              <a:rPr sz="940" b="1">
                 <a:solidFill>
                   <a:srgbClr val="FFFFFF"/>
                 </a:solidFill>
@@ -10486,7 +10495,7 @@
                 <a:ea typeface="Paperlogy 7 Bold"/>
                 <a:cs typeface="Paperlogy 7 Bold"/>
               </a:rPr>
-              <a:t>에폭</a:t>
+              <a:t>교면 PS</a:t>
             </a:r>
           </a:p>
         </p:txBody>
@@ -10499,8 +10508,8 @@
         </p:nvSpPr>
         <p:spPr>
           <a:xfrm>
-            <a:off x="4038495" y="1243584"/>
-            <a:ext cx="612333" cy="310896"/>
+            <a:off x="3965991" y="1243584"/>
+            <a:ext cx="1233939" cy="310896"/>
           </a:xfrm>
           <a:prstGeom prst="rect">
             <a:avLst/>
@@ -10519,7 +10528,7 @@
               </a:lnSpc>
             </a:pPr>
             <a:r>
-              <a:rPr sz="980" b="1">
+              <a:rPr sz="940" b="1">
                 <a:solidFill>
                   <a:srgbClr val="FFFFFF"/>
                 </a:solidFill>
@@ -10527,7 +10536,7 @@
                 <a:ea typeface="Paperlogy 7 Bold"/>
                 <a:cs typeface="Paperlogy 7 Bold"/>
               </a:rPr>
-              <a:t>데크 PS</a:t>
+              <a:t>속도(지반보정)</a:t>
             </a:r>
           </a:p>
         </p:txBody>
@@ -10540,8 +10549,8 @@
         </p:nvSpPr>
         <p:spPr>
           <a:xfrm>
-            <a:off x="4815420" y="1243584"/>
-            <a:ext cx="952237" cy="310896"/>
+            <a:off x="5364522" y="1243584"/>
+            <a:ext cx="1041038" cy="310896"/>
           </a:xfrm>
           <a:prstGeom prst="rect">
             <a:avLst/>
@@ -10560,7 +10569,7 @@
               </a:lnSpc>
             </a:pPr>
             <a:r>
-              <a:rPr sz="980" b="1">
+              <a:rPr sz="940" b="1">
                 <a:solidFill>
                   <a:srgbClr val="FFFFFF"/>
                 </a:solidFill>
@@ -10568,7 +10577,7 @@
                 <a:ea typeface="Paperlogy 7 Bold"/>
                 <a:cs typeface="Paperlogy 7 Bold"/>
               </a:rPr>
-              <a:t>속도 중앙값</a:t>
+              <a:t>연주기</a:t>
             </a:r>
           </a:p>
         </p:txBody>
@@ -10581,8 +10590,8 @@
         </p:nvSpPr>
         <p:spPr>
           <a:xfrm>
-            <a:off x="5932249" y="1243584"/>
-            <a:ext cx="515217" cy="310896"/>
+            <a:off x="6570152" y="1243584"/>
+            <a:ext cx="799912" cy="310896"/>
           </a:xfrm>
           <a:prstGeom prst="rect">
             <a:avLst/>
@@ -10601,7 +10610,7 @@
               </a:lnSpc>
             </a:pPr>
             <a:r>
-              <a:rPr sz="980" b="1">
+              <a:rPr sz="940" b="1">
                 <a:solidFill>
                   <a:srgbClr val="FFFFFF"/>
                 </a:solidFill>
@@ -10609,7 +10618,7 @@
                 <a:ea typeface="Paperlogy 7 Bold"/>
                 <a:cs typeface="Paperlogy 7 Bold"/>
               </a:rPr>
-              <a:t>CRI</a:t>
+              <a:t>GNSS 대조</a:t>
             </a:r>
           </a:p>
         </p:txBody>
@@ -10622,8 +10631,8 @@
         </p:nvSpPr>
         <p:spPr>
           <a:xfrm>
-            <a:off x="6612058" y="1243584"/>
-            <a:ext cx="758006" cy="310896"/>
+            <a:off x="493776" y="1554480"/>
+            <a:ext cx="1041038" cy="306324"/>
           </a:xfrm>
           <a:prstGeom prst="rect">
             <a:avLst/>
@@ -10636,21 +10645,21 @@
           </a:bodyPr>
           <a:lstStyle/>
           <a:p>
-            <a:pPr algn="ctr">
-              <a:lnSpc>
-                <a:spcPct val="100000"/>
-              </a:lnSpc>
-            </a:pPr>
-            <a:r>
-              <a:rPr sz="980" b="1">
-                <a:solidFill>
-                  <a:srgbClr val="FFFFFF"/>
+            <a:pPr algn="l">
+              <a:lnSpc>
+                <a:spcPct val="100000"/>
+              </a:lnSpc>
+            </a:pPr>
+            <a:r>
+              <a:rPr sz="940" b="1">
+                <a:solidFill>
+                  <a:srgbClr val="373D47"/>
                 </a:solidFill>
                 <a:latin typeface="Paperlogy 7 Bold"/>
                 <a:ea typeface="Paperlogy 7 Bold"/>
                 <a:cs typeface="Paperlogy 7 Bold"/>
               </a:rPr>
-              <a:t>감사</a:t>
+              <a:t>가양대교</a:t>
             </a:r>
           </a:p>
         </p:txBody>
@@ -10663,8 +10672,8 @@
         </p:nvSpPr>
         <p:spPr>
           <a:xfrm>
-            <a:off x="493776" y="1554480"/>
-            <a:ext cx="1146468" cy="306324"/>
+            <a:off x="1699406" y="1554480"/>
+            <a:ext cx="607011" cy="306324"/>
           </a:xfrm>
           <a:prstGeom prst="rect">
             <a:avLst/>
@@ -10677,54 +10686,13 @@
           </a:bodyPr>
           <a:lstStyle/>
           <a:p>
-            <a:pPr algn="l">
-              <a:lnSpc>
-                <a:spcPct val="100000"/>
-              </a:lnSpc>
-            </a:pPr>
-            <a:r>
-              <a:rPr sz="980" b="1">
-                <a:solidFill>
-                  <a:srgbClr val="373D47"/>
-                </a:solidFill>
-                <a:latin typeface="Paperlogy 7 Bold"/>
-                <a:ea typeface="Paperlogy 7 Bold"/>
-                <a:cs typeface="Paperlogy 7 Bold"/>
-              </a:rPr>
-              <a:t>가양대교</a:t>
-            </a:r>
-          </a:p>
-        </p:txBody>
-      </p:sp>
-      <p:sp>
-        <p:nvSpPr>
-          <p:cNvPr id="21" name="TextBox 20"/>
-          <p:cNvSpPr txBox="1"/>
-          <p:nvPr/>
-        </p:nvSpPr>
-        <p:spPr>
-          <a:xfrm>
-            <a:off x="1804836" y="1554480"/>
-            <a:ext cx="660890" cy="306324"/>
-          </a:xfrm>
-          <a:prstGeom prst="rect">
-            <a:avLst/>
-          </a:prstGeom>
-          <a:noFill/>
-        </p:spPr>
-        <p:txBody>
-          <a:bodyPr wrap="square" anchor="ctr" lIns="0" rIns="0" tIns="0" bIns="0">
-            <a:spAutoFit/>
-          </a:bodyPr>
-          <a:lstStyle/>
-          <a:p>
             <a:pPr algn="ctr">
               <a:lnSpc>
                 <a:spcPct val="100000"/>
               </a:lnSpc>
             </a:pPr>
             <a:r>
-              <a:rPr sz="980" b="0">
+              <a:rPr sz="940" b="0">
                 <a:solidFill>
                   <a:srgbClr val="373D47"/>
                 </a:solidFill>
@@ -10739,14 +10707,14 @@
       </p:sp>
       <p:sp>
         <p:nvSpPr>
-          <p:cNvPr id="22" name="TextBox 21"/>
-          <p:cNvSpPr txBox="1"/>
-          <p:nvPr/>
-        </p:nvSpPr>
-        <p:spPr>
-          <a:xfrm>
-            <a:off x="2630319" y="1554480"/>
-            <a:ext cx="660890" cy="306324"/>
+          <p:cNvPr id="21" name="TextBox 20"/>
+          <p:cNvSpPr txBox="1"/>
+          <p:nvPr/>
+        </p:nvSpPr>
+        <p:spPr>
+          <a:xfrm>
+            <a:off x="2471009" y="1554480"/>
+            <a:ext cx="607011" cy="306324"/>
           </a:xfrm>
           <a:prstGeom prst="rect">
             <a:avLst/>
@@ -10765,7 +10733,7 @@
               </a:lnSpc>
             </a:pPr>
             <a:r>
-              <a:rPr sz="980" b="0">
+              <a:rPr sz="940" b="0">
                 <a:solidFill>
                   <a:srgbClr val="373D47"/>
                 </a:solidFill>
@@ -10780,14 +10748,14 @@
       </p:sp>
       <p:sp>
         <p:nvSpPr>
-          <p:cNvPr id="23" name="TextBox 22"/>
-          <p:cNvSpPr txBox="1"/>
-          <p:nvPr/>
-        </p:nvSpPr>
-        <p:spPr>
-          <a:xfrm>
-            <a:off x="3455801" y="1554480"/>
-            <a:ext cx="418102" cy="306324"/>
+          <p:cNvPr id="22" name="TextBox 21"/>
+          <p:cNvSpPr txBox="1"/>
+          <p:nvPr/>
+        </p:nvSpPr>
+        <p:spPr>
+          <a:xfrm>
+            <a:off x="3242613" y="1554480"/>
+            <a:ext cx="558786" cy="306324"/>
           </a:xfrm>
           <a:prstGeom prst="rect">
             <a:avLst/>
@@ -10806,7 +10774,7 @@
               </a:lnSpc>
             </a:pPr>
             <a:r>
-              <a:rPr sz="980" b="0">
+              <a:rPr sz="940" b="0">
                 <a:solidFill>
                   <a:srgbClr val="373D47"/>
                 </a:solidFill>
@@ -10814,21 +10782,21 @@
                 <a:ea typeface="Paperlogy 5 Medium"/>
                 <a:cs typeface="Paperlogy 5 Medium"/>
               </a:rPr>
-              <a:t>51</a:t>
-            </a:r>
-          </a:p>
-        </p:txBody>
-      </p:sp>
-      <p:sp>
-        <p:nvSpPr>
-          <p:cNvPr id="24" name="TextBox 23"/>
-          <p:cNvSpPr txBox="1"/>
-          <p:nvPr/>
-        </p:nvSpPr>
-        <p:spPr>
-          <a:xfrm>
-            <a:off x="4038495" y="1554480"/>
-            <a:ext cx="612333" cy="306324"/>
+              <a:t>113</a:t>
+            </a:r>
+          </a:p>
+        </p:txBody>
+      </p:sp>
+      <p:sp>
+        <p:nvSpPr>
+          <p:cNvPr id="23" name="TextBox 22"/>
+          <p:cNvSpPr txBox="1"/>
+          <p:nvPr/>
+        </p:nvSpPr>
+        <p:spPr>
+          <a:xfrm>
+            <a:off x="3965991" y="1554480"/>
+            <a:ext cx="1233939" cy="306324"/>
           </a:xfrm>
           <a:prstGeom prst="rect">
             <a:avLst/>
@@ -10847,29 +10815,29 @@
               </a:lnSpc>
             </a:pPr>
             <a:r>
-              <a:rPr sz="980" b="0">
-                <a:solidFill>
-                  <a:srgbClr val="373D47"/>
+              <a:rPr sz="940" b="0">
+                <a:solidFill>
+                  <a:srgbClr val="1E7A54"/>
                 </a:solidFill>
                 <a:latin typeface="Paperlogy 5 Medium"/>
                 <a:ea typeface="Paperlogy 5 Medium"/>
                 <a:cs typeface="Paperlogy 5 Medium"/>
               </a:rPr>
-              <a:t>167</a:t>
-            </a:r>
-          </a:p>
-        </p:txBody>
-      </p:sp>
-      <p:sp>
-        <p:nvSpPr>
-          <p:cNvPr id="25" name="TextBox 24"/>
-          <p:cNvSpPr txBox="1"/>
-          <p:nvPr/>
-        </p:nvSpPr>
-        <p:spPr>
-          <a:xfrm>
-            <a:off x="4815420" y="1554480"/>
-            <a:ext cx="952237" cy="306324"/>
+              <a:t>+0.03 ± 0.90</a:t>
+            </a:r>
+          </a:p>
+        </p:txBody>
+      </p:sp>
+      <p:sp>
+        <p:nvSpPr>
+          <p:cNvPr id="24" name="TextBox 23"/>
+          <p:cNvSpPr txBox="1"/>
+          <p:nvPr/>
+        </p:nvSpPr>
+        <p:spPr>
+          <a:xfrm>
+            <a:off x="5364522" y="1554480"/>
+            <a:ext cx="1041038" cy="306324"/>
           </a:xfrm>
           <a:prstGeom prst="rect">
             <a:avLst/>
@@ -10888,7 +10856,7 @@
               </a:lnSpc>
             </a:pPr>
             <a:r>
-              <a:rPr sz="980" b="0">
+              <a:rPr sz="940" b="0">
                 <a:solidFill>
                   <a:srgbClr val="373D47"/>
                 </a:solidFill>
@@ -10896,21 +10864,21 @@
                 <a:ea typeface="Paperlogy 5 Medium"/>
                 <a:cs typeface="Paperlogy 5 Medium"/>
               </a:rPr>
-              <a:t>+0.17 mm/년</a:t>
-            </a:r>
-          </a:p>
-        </p:txBody>
-      </p:sp>
-      <p:sp>
-        <p:nvSpPr>
-          <p:cNvPr id="26" name="TextBox 25"/>
-          <p:cNvSpPr txBox="1"/>
-          <p:nvPr/>
-        </p:nvSpPr>
-        <p:spPr>
-          <a:xfrm>
-            <a:off x="5932249" y="1554480"/>
-            <a:ext cx="515217" cy="306324"/>
+              <a:t>2.3 mm · 9.8월</a:t>
+            </a:r>
+          </a:p>
+        </p:txBody>
+      </p:sp>
+      <p:sp>
+        <p:nvSpPr>
+          <p:cNvPr id="25" name="TextBox 24"/>
+          <p:cNvSpPr txBox="1"/>
+          <p:nvPr/>
+        </p:nvSpPr>
+        <p:spPr>
+          <a:xfrm>
+            <a:off x="6570152" y="1554480"/>
+            <a:ext cx="799912" cy="306324"/>
           </a:xfrm>
           <a:prstGeom prst="rect">
             <a:avLst/>
@@ -10929,63 +10897,22 @@
               </a:lnSpc>
             </a:pPr>
             <a:r>
-              <a:rPr sz="980" b="0">
-                <a:solidFill>
-                  <a:srgbClr val="373D47"/>
+              <a:rPr sz="940" b="0">
+                <a:solidFill>
+                  <a:srgbClr val="C0392B"/>
                 </a:solidFill>
                 <a:latin typeface="Paperlogy 5 Medium"/>
                 <a:ea typeface="Paperlogy 5 Medium"/>
                 <a:cs typeface="Paperlogy 5 Medium"/>
               </a:rPr>
-              <a:t>0.866</a:t>
-            </a:r>
-          </a:p>
-        </p:txBody>
-      </p:sp>
-      <p:sp>
-        <p:nvSpPr>
-          <p:cNvPr id="27" name="TextBox 26"/>
-          <p:cNvSpPr txBox="1"/>
-          <p:nvPr/>
-        </p:nvSpPr>
-        <p:spPr>
-          <a:xfrm>
-            <a:off x="6612058" y="1554480"/>
-            <a:ext cx="758006" cy="306324"/>
-          </a:xfrm>
-          <a:prstGeom prst="rect">
-            <a:avLst/>
-          </a:prstGeom>
-          <a:noFill/>
-        </p:spPr>
-        <p:txBody>
-          <a:bodyPr wrap="square" anchor="ctr" lIns="0" rIns="0" tIns="0" bIns="0">
-            <a:spAutoFit/>
-          </a:bodyPr>
-          <a:lstStyle/>
-          <a:p>
-            <a:pPr algn="ctr">
-              <a:lnSpc>
-                <a:spcPct val="100000"/>
-              </a:lnSpc>
-            </a:pPr>
-            <a:r>
-              <a:rPr sz="980" b="0">
-                <a:solidFill>
-                  <a:srgbClr val="ED6C00"/>
-                </a:solidFill>
-                <a:latin typeface="Paperlogy 5 Medium"/>
-                <a:ea typeface="Paperlogy 5 Medium"/>
-                <a:cs typeface="Paperlogy 5 Medium"/>
-              </a:rPr>
-              <a:t>조건부</a:t>
-            </a:r>
-          </a:p>
-        </p:txBody>
-      </p:sp>
-      <p:sp>
-        <p:nvSpPr>
-          <p:cNvPr id="28" name="Rectangle 27"/>
+              <a:t>-3.1개월</a:t>
+            </a:r>
+          </a:p>
+        </p:txBody>
+      </p:sp>
+      <p:sp>
+        <p:nvSpPr>
+          <p:cNvPr id="26" name="Rectangle 25"/>
           <p:cNvSpPr/>
           <p:nvPr/>
         </p:nvSpPr>
@@ -11029,7 +10956,7 @@
       </p:sp>
       <p:sp>
         <p:nvSpPr>
-          <p:cNvPr id="29" name="Rectangle 28"/>
+          <p:cNvPr id="27" name="Rectangle 26"/>
           <p:cNvSpPr/>
           <p:nvPr/>
         </p:nvSpPr>
@@ -11073,14 +11000,14 @@
       </p:sp>
       <p:sp>
         <p:nvSpPr>
-          <p:cNvPr id="30" name="TextBox 29"/>
+          <p:cNvPr id="28" name="TextBox 27"/>
           <p:cNvSpPr txBox="1"/>
           <p:nvPr/>
         </p:nvSpPr>
         <p:spPr>
           <a:xfrm>
             <a:off x="493776" y="1860804"/>
-            <a:ext cx="1146468" cy="306324"/>
+            <a:ext cx="1041038" cy="306324"/>
           </a:xfrm>
           <a:prstGeom prst="rect">
             <a:avLst/>
@@ -11099,7 +11026,7 @@
               </a:lnSpc>
             </a:pPr>
             <a:r>
-              <a:rPr sz="980" b="1">
+              <a:rPr sz="940" b="1">
                 <a:solidFill>
                   <a:srgbClr val="373D47"/>
                 </a:solidFill>
@@ -11114,14 +11041,14 @@
       </p:sp>
       <p:sp>
         <p:nvSpPr>
-          <p:cNvPr id="31" name="TextBox 30"/>
-          <p:cNvSpPr txBox="1"/>
-          <p:nvPr/>
-        </p:nvSpPr>
-        <p:spPr>
-          <a:xfrm>
-            <a:off x="1804836" y="1860804"/>
-            <a:ext cx="660890" cy="306324"/>
+          <p:cNvPr id="29" name="TextBox 28"/>
+          <p:cNvSpPr txBox="1"/>
+          <p:nvPr/>
+        </p:nvSpPr>
+        <p:spPr>
+          <a:xfrm>
+            <a:off x="1699406" y="1860804"/>
+            <a:ext cx="607011" cy="306324"/>
           </a:xfrm>
           <a:prstGeom prst="rect">
             <a:avLst/>
@@ -11140,7 +11067,7 @@
               </a:lnSpc>
             </a:pPr>
             <a:r>
-              <a:rPr sz="980" b="0">
+              <a:rPr sz="940" b="0">
                 <a:solidFill>
                   <a:srgbClr val="373D47"/>
                 </a:solidFill>
@@ -11155,14 +11082,14 @@
       </p:sp>
       <p:sp>
         <p:nvSpPr>
-          <p:cNvPr id="32" name="TextBox 31"/>
-          <p:cNvSpPr txBox="1"/>
-          <p:nvPr/>
-        </p:nvSpPr>
-        <p:spPr>
-          <a:xfrm>
-            <a:off x="2630319" y="1860804"/>
-            <a:ext cx="660890" cy="306324"/>
+          <p:cNvPr id="30" name="TextBox 29"/>
+          <p:cNvSpPr txBox="1"/>
+          <p:nvPr/>
+        </p:nvSpPr>
+        <p:spPr>
+          <a:xfrm>
+            <a:off x="2471009" y="1860804"/>
+            <a:ext cx="607011" cy="306324"/>
           </a:xfrm>
           <a:prstGeom prst="rect">
             <a:avLst/>
@@ -11181,7 +11108,7 @@
               </a:lnSpc>
             </a:pPr>
             <a:r>
-              <a:rPr sz="980" b="0">
+              <a:rPr sz="940" b="0">
                 <a:solidFill>
                   <a:srgbClr val="373D47"/>
                 </a:solidFill>
@@ -11196,14 +11123,14 @@
       </p:sp>
       <p:sp>
         <p:nvSpPr>
-          <p:cNvPr id="33" name="TextBox 32"/>
-          <p:cNvSpPr txBox="1"/>
-          <p:nvPr/>
-        </p:nvSpPr>
-        <p:spPr>
-          <a:xfrm>
-            <a:off x="3455801" y="1860804"/>
-            <a:ext cx="418102" cy="306324"/>
+          <p:cNvPr id="31" name="TextBox 30"/>
+          <p:cNvSpPr txBox="1"/>
+          <p:nvPr/>
+        </p:nvSpPr>
+        <p:spPr>
+          <a:xfrm>
+            <a:off x="3242613" y="1860804"/>
+            <a:ext cx="558786" cy="306324"/>
           </a:xfrm>
           <a:prstGeom prst="rect">
             <a:avLst/>
@@ -11222,7 +11149,7 @@
               </a:lnSpc>
             </a:pPr>
             <a:r>
-              <a:rPr sz="980" b="0">
+              <a:rPr sz="940" b="0">
                 <a:solidFill>
                   <a:srgbClr val="373D47"/>
                 </a:solidFill>
@@ -11230,21 +11157,21 @@
                 <a:ea typeface="Paperlogy 5 Medium"/>
                 <a:cs typeface="Paperlogy 5 Medium"/>
               </a:rPr>
-              <a:t>51</a:t>
-            </a:r>
-          </a:p>
-        </p:txBody>
-      </p:sp>
-      <p:sp>
-        <p:nvSpPr>
-          <p:cNvPr id="34" name="TextBox 33"/>
-          <p:cNvSpPr txBox="1"/>
-          <p:nvPr/>
-        </p:nvSpPr>
-        <p:spPr>
-          <a:xfrm>
-            <a:off x="4038495" y="1860804"/>
-            <a:ext cx="612333" cy="306324"/>
+              <a:t>17</a:t>
+            </a:r>
+          </a:p>
+        </p:txBody>
+      </p:sp>
+      <p:sp>
+        <p:nvSpPr>
+          <p:cNvPr id="32" name="TextBox 31"/>
+          <p:cNvSpPr txBox="1"/>
+          <p:nvPr/>
+        </p:nvSpPr>
+        <p:spPr>
+          <a:xfrm>
+            <a:off x="3965991" y="1860804"/>
+            <a:ext cx="1233939" cy="306324"/>
           </a:xfrm>
           <a:prstGeom prst="rect">
             <a:avLst/>
@@ -11263,29 +11190,29 @@
               </a:lnSpc>
             </a:pPr>
             <a:r>
-              <a:rPr sz="980" b="0">
-                <a:solidFill>
-                  <a:srgbClr val="373D47"/>
+              <a:rPr sz="940" b="0">
+                <a:solidFill>
+                  <a:srgbClr val="1E7A54"/>
                 </a:solidFill>
                 <a:latin typeface="Paperlogy 5 Medium"/>
                 <a:ea typeface="Paperlogy 5 Medium"/>
                 <a:cs typeface="Paperlogy 5 Medium"/>
               </a:rPr>
-              <a:t>45</a:t>
-            </a:r>
-          </a:p>
-        </p:txBody>
-      </p:sp>
-      <p:sp>
-        <p:nvSpPr>
-          <p:cNvPr id="35" name="TextBox 34"/>
-          <p:cNvSpPr txBox="1"/>
-          <p:nvPr/>
-        </p:nvSpPr>
-        <p:spPr>
-          <a:xfrm>
-            <a:off x="4815420" y="1860804"/>
-            <a:ext cx="952237" cy="306324"/>
+              <a:t>-1.32 ± 1.35</a:t>
+            </a:r>
+          </a:p>
+        </p:txBody>
+      </p:sp>
+      <p:sp>
+        <p:nvSpPr>
+          <p:cNvPr id="33" name="TextBox 32"/>
+          <p:cNvSpPr txBox="1"/>
+          <p:nvPr/>
+        </p:nvSpPr>
+        <p:spPr>
+          <a:xfrm>
+            <a:off x="5364522" y="1860804"/>
+            <a:ext cx="1041038" cy="306324"/>
           </a:xfrm>
           <a:prstGeom prst="rect">
             <a:avLst/>
@@ -11304,7 +11231,7 @@
               </a:lnSpc>
             </a:pPr>
             <a:r>
-              <a:rPr sz="980" b="0">
+              <a:rPr sz="940" b="0">
                 <a:solidFill>
                   <a:srgbClr val="373D47"/>
                 </a:solidFill>
@@ -11312,21 +11239,21 @@
                 <a:ea typeface="Paperlogy 5 Medium"/>
                 <a:cs typeface="Paperlogy 5 Medium"/>
               </a:rPr>
-              <a:t>-0.36 mm/년</a:t>
-            </a:r>
-          </a:p>
-        </p:txBody>
-      </p:sp>
-      <p:sp>
-        <p:nvSpPr>
-          <p:cNvPr id="36" name="TextBox 35"/>
-          <p:cNvSpPr txBox="1"/>
-          <p:nvPr/>
-        </p:nvSpPr>
-        <p:spPr>
-          <a:xfrm>
-            <a:off x="5932249" y="1860804"/>
-            <a:ext cx="515217" cy="306324"/>
+              <a:t>4.1 mm · 12.1월</a:t>
+            </a:r>
+          </a:p>
+        </p:txBody>
+      </p:sp>
+      <p:sp>
+        <p:nvSpPr>
+          <p:cNvPr id="34" name="TextBox 33"/>
+          <p:cNvSpPr txBox="1"/>
+          <p:nvPr/>
+        </p:nvSpPr>
+        <p:spPr>
+          <a:xfrm>
+            <a:off x="6570152" y="1860804"/>
+            <a:ext cx="799912" cy="306324"/>
           </a:xfrm>
           <a:prstGeom prst="rect">
             <a:avLst/>
@@ -11345,63 +11272,22 @@
               </a:lnSpc>
             </a:pPr>
             <a:r>
-              <a:rPr sz="980" b="0">
-                <a:solidFill>
-                  <a:srgbClr val="373D47"/>
+              <a:rPr sz="940" b="0">
+                <a:solidFill>
+                  <a:srgbClr val="1E7A54"/>
                 </a:solidFill>
                 <a:latin typeface="Paperlogy 5 Medium"/>
                 <a:ea typeface="Paperlogy 5 Medium"/>
                 <a:cs typeface="Paperlogy 5 Medium"/>
               </a:rPr>
-              <a:t>0.832</a:t>
-            </a:r>
-          </a:p>
-        </p:txBody>
-      </p:sp>
-      <p:sp>
-        <p:nvSpPr>
-          <p:cNvPr id="37" name="TextBox 36"/>
-          <p:cNvSpPr txBox="1"/>
-          <p:nvPr/>
-        </p:nvSpPr>
-        <p:spPr>
-          <a:xfrm>
-            <a:off x="6612058" y="1860804"/>
-            <a:ext cx="758006" cy="306324"/>
-          </a:xfrm>
-          <a:prstGeom prst="rect">
-            <a:avLst/>
-          </a:prstGeom>
-          <a:noFill/>
-        </p:spPr>
-        <p:txBody>
-          <a:bodyPr wrap="square" anchor="ctr" lIns="0" rIns="0" tIns="0" bIns="0">
-            <a:spAutoFit/>
-          </a:bodyPr>
-          <a:lstStyle/>
-          <a:p>
-            <a:pPr algn="ctr">
-              <a:lnSpc>
-                <a:spcPct val="100000"/>
-              </a:lnSpc>
-            </a:pPr>
-            <a:r>
-              <a:rPr sz="980" b="0">
-                <a:solidFill>
-                  <a:srgbClr val="C0392B"/>
-                </a:solidFill>
-                <a:latin typeface="Paperlogy 5 Medium"/>
-                <a:ea typeface="Paperlogy 5 Medium"/>
-                <a:cs typeface="Paperlogy 5 Medium"/>
-              </a:rPr>
-              <a:t>보고 불가</a:t>
-            </a:r>
-          </a:p>
-        </p:txBody>
-      </p:sp>
-      <p:sp>
-        <p:nvSpPr>
-          <p:cNvPr id="38" name="Rectangle 37"/>
+              <a:t>+1.3개월</a:t>
+            </a:r>
+          </a:p>
+        </p:txBody>
+      </p:sp>
+      <p:sp>
+        <p:nvSpPr>
+          <p:cNvPr id="35" name="Rectangle 34"/>
           <p:cNvSpPr/>
           <p:nvPr/>
         </p:nvSpPr>
@@ -11445,14 +11331,14 @@
       </p:sp>
       <p:sp>
         <p:nvSpPr>
-          <p:cNvPr id="39" name="TextBox 38"/>
+          <p:cNvPr id="36" name="TextBox 35"/>
           <p:cNvSpPr txBox="1"/>
           <p:nvPr/>
         </p:nvSpPr>
         <p:spPr>
           <a:xfrm>
             <a:off x="493776" y="2167128"/>
-            <a:ext cx="1146468" cy="306324"/>
+            <a:ext cx="1041038" cy="306324"/>
           </a:xfrm>
           <a:prstGeom prst="rect">
             <a:avLst/>
@@ -11471,7 +11357,7 @@
               </a:lnSpc>
             </a:pPr>
             <a:r>
-              <a:rPr sz="980" b="1">
+              <a:rPr sz="940" b="1">
                 <a:solidFill>
                   <a:srgbClr val="373D47"/>
                 </a:solidFill>
@@ -11486,14 +11372,14 @@
       </p:sp>
       <p:sp>
         <p:nvSpPr>
-          <p:cNvPr id="40" name="TextBox 39"/>
-          <p:cNvSpPr txBox="1"/>
-          <p:nvPr/>
-        </p:nvSpPr>
-        <p:spPr>
-          <a:xfrm>
-            <a:off x="1804836" y="2167128"/>
-            <a:ext cx="660890" cy="306324"/>
+          <p:cNvPr id="37" name="TextBox 36"/>
+          <p:cNvSpPr txBox="1"/>
+          <p:nvPr/>
+        </p:nvSpPr>
+        <p:spPr>
+          <a:xfrm>
+            <a:off x="1699406" y="2167128"/>
+            <a:ext cx="607011" cy="306324"/>
           </a:xfrm>
           <a:prstGeom prst="rect">
             <a:avLst/>
@@ -11512,7 +11398,7 @@
               </a:lnSpc>
             </a:pPr>
             <a:r>
-              <a:rPr sz="980" b="0">
+              <a:rPr sz="940" b="0">
                 <a:solidFill>
                   <a:srgbClr val="373D47"/>
                 </a:solidFill>
@@ -11527,14 +11413,14 @@
       </p:sp>
       <p:sp>
         <p:nvSpPr>
-          <p:cNvPr id="41" name="TextBox 40"/>
-          <p:cNvSpPr txBox="1"/>
-          <p:nvPr/>
-        </p:nvSpPr>
-        <p:spPr>
-          <a:xfrm>
-            <a:off x="2630319" y="2167128"/>
-            <a:ext cx="660890" cy="306324"/>
+          <p:cNvPr id="38" name="TextBox 37"/>
+          <p:cNvSpPr txBox="1"/>
+          <p:nvPr/>
+        </p:nvSpPr>
+        <p:spPr>
+          <a:xfrm>
+            <a:off x="2471009" y="2167128"/>
+            <a:ext cx="607011" cy="306324"/>
           </a:xfrm>
           <a:prstGeom prst="rect">
             <a:avLst/>
@@ -11553,7 +11439,7 @@
               </a:lnSpc>
             </a:pPr>
             <a:r>
-              <a:rPr sz="980" b="0">
+              <a:rPr sz="940" b="0">
                 <a:solidFill>
                   <a:srgbClr val="373D47"/>
                 </a:solidFill>
@@ -11568,14 +11454,14 @@
       </p:sp>
       <p:sp>
         <p:nvSpPr>
-          <p:cNvPr id="42" name="TextBox 41"/>
-          <p:cNvSpPr txBox="1"/>
-          <p:nvPr/>
-        </p:nvSpPr>
-        <p:spPr>
-          <a:xfrm>
-            <a:off x="3455801" y="2167128"/>
-            <a:ext cx="418102" cy="306324"/>
+          <p:cNvPr id="39" name="TextBox 38"/>
+          <p:cNvSpPr txBox="1"/>
+          <p:nvPr/>
+        </p:nvSpPr>
+        <p:spPr>
+          <a:xfrm>
+            <a:off x="3242613" y="2167128"/>
+            <a:ext cx="558786" cy="306324"/>
           </a:xfrm>
           <a:prstGeom prst="rect">
             <a:avLst/>
@@ -11594,7 +11480,7 @@
               </a:lnSpc>
             </a:pPr>
             <a:r>
-              <a:rPr sz="980" b="0">
+              <a:rPr sz="940" b="0">
                 <a:solidFill>
                   <a:srgbClr val="373D47"/>
                 </a:solidFill>
@@ -11602,21 +11488,21 @@
                 <a:ea typeface="Paperlogy 5 Medium"/>
                 <a:cs typeface="Paperlogy 5 Medium"/>
               </a:rPr>
-              <a:t>101</a:t>
-            </a:r>
-          </a:p>
-        </p:txBody>
-      </p:sp>
-      <p:sp>
-        <p:nvSpPr>
-          <p:cNvPr id="43" name="TextBox 42"/>
-          <p:cNvSpPr txBox="1"/>
-          <p:nvPr/>
-        </p:nvSpPr>
-        <p:spPr>
-          <a:xfrm>
-            <a:off x="4038495" y="2167128"/>
-            <a:ext cx="612333" cy="306324"/>
+              <a:t>20</a:t>
+            </a:r>
+          </a:p>
+        </p:txBody>
+      </p:sp>
+      <p:sp>
+        <p:nvSpPr>
+          <p:cNvPr id="40" name="TextBox 39"/>
+          <p:cNvSpPr txBox="1"/>
+          <p:nvPr/>
+        </p:nvSpPr>
+        <p:spPr>
+          <a:xfrm>
+            <a:off x="3965991" y="2167128"/>
+            <a:ext cx="1233939" cy="306324"/>
           </a:xfrm>
           <a:prstGeom prst="rect">
             <a:avLst/>
@@ -11635,29 +11521,29 @@
               </a:lnSpc>
             </a:pPr>
             <a:r>
-              <a:rPr sz="980" b="0">
-                <a:solidFill>
-                  <a:srgbClr val="373D47"/>
+              <a:rPr sz="940" b="0">
+                <a:solidFill>
+                  <a:srgbClr val="1E7A54"/>
                 </a:solidFill>
                 <a:latin typeface="Paperlogy 5 Medium"/>
                 <a:ea typeface="Paperlogy 5 Medium"/>
                 <a:cs typeface="Paperlogy 5 Medium"/>
               </a:rPr>
-              <a:t>56</a:t>
-            </a:r>
-          </a:p>
-        </p:txBody>
-      </p:sp>
-      <p:sp>
-        <p:nvSpPr>
-          <p:cNvPr id="44" name="TextBox 43"/>
-          <p:cNvSpPr txBox="1"/>
-          <p:nvPr/>
-        </p:nvSpPr>
-        <p:spPr>
-          <a:xfrm>
-            <a:off x="4815420" y="2167128"/>
-            <a:ext cx="952237" cy="306324"/>
+              <a:t>-0.48 ± 1.42</a:t>
+            </a:r>
+          </a:p>
+        </p:txBody>
+      </p:sp>
+      <p:sp>
+        <p:nvSpPr>
+          <p:cNvPr id="41" name="TextBox 40"/>
+          <p:cNvSpPr txBox="1"/>
+          <p:nvPr/>
+        </p:nvSpPr>
+        <p:spPr>
+          <a:xfrm>
+            <a:off x="5364522" y="2167128"/>
+            <a:ext cx="1041038" cy="306324"/>
           </a:xfrm>
           <a:prstGeom prst="rect">
             <a:avLst/>
@@ -11676,7 +11562,7 @@
               </a:lnSpc>
             </a:pPr>
             <a:r>
-              <a:rPr sz="980" b="0">
+              <a:rPr sz="940" b="0">
                 <a:solidFill>
                   <a:srgbClr val="373D47"/>
                 </a:solidFill>
@@ -11684,21 +11570,21 @@
                 <a:ea typeface="Paperlogy 5 Medium"/>
                 <a:cs typeface="Paperlogy 5 Medium"/>
               </a:rPr>
-              <a:t>-1.38 mm/년</a:t>
-            </a:r>
-          </a:p>
-        </p:txBody>
-      </p:sp>
-      <p:sp>
-        <p:nvSpPr>
-          <p:cNvPr id="45" name="TextBox 44"/>
-          <p:cNvSpPr txBox="1"/>
-          <p:nvPr/>
-        </p:nvSpPr>
-        <p:spPr>
-          <a:xfrm>
-            <a:off x="5932249" y="2167128"/>
-            <a:ext cx="515217" cy="306324"/>
+              <a:t>2.4 mm · 7.8월</a:t>
+            </a:r>
+          </a:p>
+        </p:txBody>
+      </p:sp>
+      <p:sp>
+        <p:nvSpPr>
+          <p:cNvPr id="42" name="TextBox 41"/>
+          <p:cNvSpPr txBox="1"/>
+          <p:nvPr/>
+        </p:nvSpPr>
+        <p:spPr>
+          <a:xfrm>
+            <a:off x="6570152" y="2167128"/>
+            <a:ext cx="799912" cy="306324"/>
           </a:xfrm>
           <a:prstGeom prst="rect">
             <a:avLst/>
@@ -11717,63 +11603,22 @@
               </a:lnSpc>
             </a:pPr>
             <a:r>
-              <a:rPr sz="980" b="0">
-                <a:solidFill>
-                  <a:srgbClr val="373D47"/>
+              <a:rPr sz="940" b="0">
+                <a:solidFill>
+                  <a:srgbClr val="C0392B"/>
                 </a:solidFill>
                 <a:latin typeface="Paperlogy 5 Medium"/>
                 <a:ea typeface="Paperlogy 5 Medium"/>
                 <a:cs typeface="Paperlogy 5 Medium"/>
               </a:rPr>
-              <a:t>0.914</a:t>
-            </a:r>
-          </a:p>
-        </p:txBody>
-      </p:sp>
-      <p:sp>
-        <p:nvSpPr>
-          <p:cNvPr id="46" name="TextBox 45"/>
-          <p:cNvSpPr txBox="1"/>
-          <p:nvPr/>
-        </p:nvSpPr>
-        <p:spPr>
-          <a:xfrm>
-            <a:off x="6612058" y="2167128"/>
-            <a:ext cx="758006" cy="306324"/>
-          </a:xfrm>
-          <a:prstGeom prst="rect">
-            <a:avLst/>
-          </a:prstGeom>
-          <a:noFill/>
-        </p:spPr>
-        <p:txBody>
-          <a:bodyPr wrap="square" anchor="ctr" lIns="0" rIns="0" tIns="0" bIns="0">
-            <a:spAutoFit/>
-          </a:bodyPr>
-          <a:lstStyle/>
-          <a:p>
-            <a:pPr algn="ctr">
-              <a:lnSpc>
-                <a:spcPct val="100000"/>
-              </a:lnSpc>
-            </a:pPr>
-            <a:r>
-              <a:rPr sz="980" b="0">
-                <a:solidFill>
-                  <a:srgbClr val="C0392B"/>
-                </a:solidFill>
-                <a:latin typeface="Paperlogy 5 Medium"/>
-                <a:ea typeface="Paperlogy 5 Medium"/>
-                <a:cs typeface="Paperlogy 5 Medium"/>
-              </a:rPr>
-              <a:t>보고 불가</a:t>
-            </a:r>
-          </a:p>
-        </p:txBody>
-      </p:sp>
-      <p:sp>
-        <p:nvSpPr>
-          <p:cNvPr id="47" name="Rectangle 46"/>
+              <a:t>-5.6개월</a:t>
+            </a:r>
+          </a:p>
+        </p:txBody>
+      </p:sp>
+      <p:sp>
+        <p:nvSpPr>
+          <p:cNvPr id="43" name="Rectangle 42"/>
           <p:cNvSpPr/>
           <p:nvPr/>
         </p:nvSpPr>
@@ -11817,7 +11662,7 @@
       </p:sp>
       <p:sp>
         <p:nvSpPr>
-          <p:cNvPr id="48" name="Rectangle 47"/>
+          <p:cNvPr id="44" name="Rectangle 43"/>
           <p:cNvSpPr/>
           <p:nvPr/>
         </p:nvSpPr>
@@ -11861,14 +11706,14 @@
       </p:sp>
       <p:sp>
         <p:nvSpPr>
-          <p:cNvPr id="49" name="TextBox 48"/>
+          <p:cNvPr id="45" name="TextBox 44"/>
           <p:cNvSpPr txBox="1"/>
           <p:nvPr/>
         </p:nvSpPr>
         <p:spPr>
           <a:xfrm>
             <a:off x="493776" y="2473452"/>
-            <a:ext cx="1146468" cy="306324"/>
+            <a:ext cx="1041038" cy="306324"/>
           </a:xfrm>
           <a:prstGeom prst="rect">
             <a:avLst/>
@@ -11887,7 +11732,7 @@
               </a:lnSpc>
             </a:pPr>
             <a:r>
-              <a:rPr sz="980" b="1">
+              <a:rPr sz="940" b="1">
                 <a:solidFill>
                   <a:srgbClr val="373D47"/>
                 </a:solidFill>
@@ -11902,14 +11747,14 @@
       </p:sp>
       <p:sp>
         <p:nvSpPr>
-          <p:cNvPr id="50" name="TextBox 49"/>
-          <p:cNvSpPr txBox="1"/>
-          <p:nvPr/>
-        </p:nvSpPr>
-        <p:spPr>
-          <a:xfrm>
-            <a:off x="1804836" y="2473452"/>
-            <a:ext cx="660890" cy="306324"/>
+          <p:cNvPr id="46" name="TextBox 45"/>
+          <p:cNvSpPr txBox="1"/>
+          <p:nvPr/>
+        </p:nvSpPr>
+        <p:spPr>
+          <a:xfrm>
+            <a:off x="1699406" y="2473452"/>
+            <a:ext cx="607011" cy="306324"/>
           </a:xfrm>
           <a:prstGeom prst="rect">
             <a:avLst/>
@@ -11928,7 +11773,7 @@
               </a:lnSpc>
             </a:pPr>
             <a:r>
-              <a:rPr sz="980" b="0">
+              <a:rPr sz="940" b="0">
                 <a:solidFill>
                   <a:srgbClr val="373D47"/>
                 </a:solidFill>
@@ -11943,14 +11788,14 @@
       </p:sp>
       <p:sp>
         <p:nvSpPr>
-          <p:cNvPr id="51" name="TextBox 50"/>
-          <p:cNvSpPr txBox="1"/>
-          <p:nvPr/>
-        </p:nvSpPr>
-        <p:spPr>
-          <a:xfrm>
-            <a:off x="2630319" y="2473452"/>
-            <a:ext cx="660890" cy="306324"/>
+          <p:cNvPr id="47" name="TextBox 46"/>
+          <p:cNvSpPr txBox="1"/>
+          <p:nvPr/>
+        </p:nvSpPr>
+        <p:spPr>
+          <a:xfrm>
+            <a:off x="2471009" y="2473452"/>
+            <a:ext cx="607011" cy="306324"/>
           </a:xfrm>
           <a:prstGeom prst="rect">
             <a:avLst/>
@@ -11969,7 +11814,7 @@
               </a:lnSpc>
             </a:pPr>
             <a:r>
-              <a:rPr sz="980" b="0">
+              <a:rPr sz="940" b="0">
                 <a:solidFill>
                   <a:srgbClr val="373D47"/>
                 </a:solidFill>
@@ -11984,14 +11829,14 @@
       </p:sp>
       <p:sp>
         <p:nvSpPr>
-          <p:cNvPr id="52" name="TextBox 51"/>
-          <p:cNvSpPr txBox="1"/>
-          <p:nvPr/>
-        </p:nvSpPr>
-        <p:spPr>
-          <a:xfrm>
-            <a:off x="3455801" y="2473452"/>
-            <a:ext cx="418102" cy="306324"/>
+          <p:cNvPr id="48" name="TextBox 47"/>
+          <p:cNvSpPr txBox="1"/>
+          <p:nvPr/>
+        </p:nvSpPr>
+        <p:spPr>
+          <a:xfrm>
+            <a:off x="3242613" y="2473452"/>
+            <a:ext cx="558786" cy="306324"/>
           </a:xfrm>
           <a:prstGeom prst="rect">
             <a:avLst/>
@@ -12010,7 +11855,7 @@
               </a:lnSpc>
             </a:pPr>
             <a:r>
-              <a:rPr sz="980" b="0">
+              <a:rPr sz="940" b="0">
                 <a:solidFill>
                   <a:srgbClr val="373D47"/>
                 </a:solidFill>
@@ -12018,21 +11863,21 @@
                 <a:ea typeface="Paperlogy 5 Medium"/>
                 <a:cs typeface="Paperlogy 5 Medium"/>
               </a:rPr>
-              <a:t>51</a:t>
-            </a:r>
-          </a:p>
-        </p:txBody>
-      </p:sp>
-      <p:sp>
-        <p:nvSpPr>
-          <p:cNvPr id="53" name="TextBox 52"/>
-          <p:cNvSpPr txBox="1"/>
-          <p:nvPr/>
-        </p:nvSpPr>
-        <p:spPr>
-          <a:xfrm>
-            <a:off x="4038495" y="2473452"/>
-            <a:ext cx="612333" cy="306324"/>
+              <a:t>—</a:t>
+            </a:r>
+          </a:p>
+        </p:txBody>
+      </p:sp>
+      <p:sp>
+        <p:nvSpPr>
+          <p:cNvPr id="49" name="TextBox 48"/>
+          <p:cNvSpPr txBox="1"/>
+          <p:nvPr/>
+        </p:nvSpPr>
+        <p:spPr>
+          <a:xfrm>
+            <a:off x="3965991" y="2473452"/>
+            <a:ext cx="1233939" cy="306324"/>
           </a:xfrm>
           <a:prstGeom prst="rect">
             <a:avLst/>
@@ -12051,29 +11896,29 @@
               </a:lnSpc>
             </a:pPr>
             <a:r>
-              <a:rPr sz="980" b="0">
-                <a:solidFill>
-                  <a:srgbClr val="373D47"/>
+              <a:rPr sz="940" b="0">
+                <a:solidFill>
+                  <a:srgbClr val="6B7480"/>
                 </a:solidFill>
                 <a:latin typeface="Paperlogy 5 Medium"/>
                 <a:ea typeface="Paperlogy 5 Medium"/>
                 <a:cs typeface="Paperlogy 5 Medium"/>
               </a:rPr>
-              <a:t>20</a:t>
-            </a:r>
-          </a:p>
-        </p:txBody>
-      </p:sp>
-      <p:sp>
-        <p:nvSpPr>
-          <p:cNvPr id="54" name="TextBox 53"/>
-          <p:cNvSpPr txBox="1"/>
-          <p:nvPr/>
-        </p:nvSpPr>
-        <p:spPr>
-          <a:xfrm>
-            <a:off x="4815420" y="2473452"/>
-            <a:ext cx="952237" cy="306324"/>
+              <a:t>—</a:t>
+            </a:r>
+          </a:p>
+        </p:txBody>
+      </p:sp>
+      <p:sp>
+        <p:nvSpPr>
+          <p:cNvPr id="50" name="TextBox 49"/>
+          <p:cNvSpPr txBox="1"/>
+          <p:nvPr/>
+        </p:nvSpPr>
+        <p:spPr>
+          <a:xfrm>
+            <a:off x="5364522" y="2473452"/>
+            <a:ext cx="1041038" cy="306324"/>
           </a:xfrm>
           <a:prstGeom prst="rect">
             <a:avLst/>
@@ -12092,7 +11937,7 @@
               </a:lnSpc>
             </a:pPr>
             <a:r>
-              <a:rPr sz="980" b="0">
+              <a:rPr sz="940" b="0">
                 <a:solidFill>
                   <a:srgbClr val="373D47"/>
                 </a:solidFill>
@@ -12100,21 +11945,21 @@
                 <a:ea typeface="Paperlogy 5 Medium"/>
                 <a:cs typeface="Paperlogy 5 Medium"/>
               </a:rPr>
-              <a:t>-0.99 mm/년</a:t>
-            </a:r>
-          </a:p>
-        </p:txBody>
-      </p:sp>
-      <p:sp>
-        <p:nvSpPr>
-          <p:cNvPr id="55" name="TextBox 54"/>
-          <p:cNvSpPr txBox="1"/>
-          <p:nvPr/>
-        </p:nvSpPr>
-        <p:spPr>
-          <a:xfrm>
-            <a:off x="5932249" y="2473452"/>
-            <a:ext cx="515217" cy="306324"/>
+              <a:t>—</a:t>
+            </a:r>
+          </a:p>
+        </p:txBody>
+      </p:sp>
+      <p:sp>
+        <p:nvSpPr>
+          <p:cNvPr id="51" name="TextBox 50"/>
+          <p:cNvSpPr txBox="1"/>
+          <p:nvPr/>
+        </p:nvSpPr>
+        <p:spPr>
+          <a:xfrm>
+            <a:off x="6570152" y="2473452"/>
+            <a:ext cx="799912" cy="306324"/>
           </a:xfrm>
           <a:prstGeom prst="rect">
             <a:avLst/>
@@ -12133,63 +11978,22 @@
               </a:lnSpc>
             </a:pPr>
             <a:r>
-              <a:rPr sz="980" b="0">
-                <a:solidFill>
-                  <a:srgbClr val="373D47"/>
+              <a:rPr sz="940" b="0">
+                <a:solidFill>
+                  <a:srgbClr val="6B7480"/>
                 </a:solidFill>
                 <a:latin typeface="Paperlogy 5 Medium"/>
                 <a:ea typeface="Paperlogy 5 Medium"/>
                 <a:cs typeface="Paperlogy 5 Medium"/>
               </a:rPr>
-              <a:t>0.786</a:t>
-            </a:r>
-          </a:p>
-        </p:txBody>
-      </p:sp>
-      <p:sp>
-        <p:nvSpPr>
-          <p:cNvPr id="56" name="TextBox 55"/>
-          <p:cNvSpPr txBox="1"/>
-          <p:nvPr/>
-        </p:nvSpPr>
-        <p:spPr>
-          <a:xfrm>
-            <a:off x="6612058" y="2473452"/>
-            <a:ext cx="758006" cy="306324"/>
-          </a:xfrm>
-          <a:prstGeom prst="rect">
-            <a:avLst/>
-          </a:prstGeom>
-          <a:noFill/>
-        </p:spPr>
-        <p:txBody>
-          <a:bodyPr wrap="square" anchor="ctr" lIns="0" rIns="0" tIns="0" bIns="0">
-            <a:spAutoFit/>
-          </a:bodyPr>
-          <a:lstStyle/>
-          <a:p>
-            <a:pPr algn="ctr">
-              <a:lnSpc>
-                <a:spcPct val="100000"/>
-              </a:lnSpc>
-            </a:pPr>
-            <a:r>
-              <a:rPr sz="980" b="0">
-                <a:solidFill>
-                  <a:srgbClr val="C0392B"/>
-                </a:solidFill>
-                <a:latin typeface="Paperlogy 5 Medium"/>
-                <a:ea typeface="Paperlogy 5 Medium"/>
-                <a:cs typeface="Paperlogy 5 Medium"/>
-              </a:rPr>
-              <a:t>보고 불가</a:t>
-            </a:r>
-          </a:p>
-        </p:txBody>
-      </p:sp>
-      <p:sp>
-        <p:nvSpPr>
-          <p:cNvPr id="57" name="Rectangle 56"/>
+              <a:t>계측 없음</a:t>
+            </a:r>
+          </a:p>
+        </p:txBody>
+      </p:sp>
+      <p:sp>
+        <p:nvSpPr>
+          <p:cNvPr id="52" name="Rectangle 51"/>
           <p:cNvSpPr/>
           <p:nvPr/>
         </p:nvSpPr>
@@ -12233,14 +12037,14 @@
       </p:sp>
       <p:sp>
         <p:nvSpPr>
-          <p:cNvPr id="58" name="TextBox 57"/>
+          <p:cNvPr id="53" name="TextBox 52"/>
           <p:cNvSpPr txBox="1"/>
           <p:nvPr/>
         </p:nvSpPr>
         <p:spPr>
           <a:xfrm>
             <a:off x="493776" y="2779776"/>
-            <a:ext cx="1146468" cy="306324"/>
+            <a:ext cx="1041038" cy="306324"/>
           </a:xfrm>
           <a:prstGeom prst="rect">
             <a:avLst/>
@@ -12259,7 +12063,7 @@
               </a:lnSpc>
             </a:pPr>
             <a:r>
-              <a:rPr sz="980" b="1">
+              <a:rPr sz="940" b="1">
                 <a:solidFill>
                   <a:srgbClr val="373D47"/>
                 </a:solidFill>
@@ -12274,14 +12078,14 @@
       </p:sp>
       <p:sp>
         <p:nvSpPr>
-          <p:cNvPr id="59" name="TextBox 58"/>
-          <p:cNvSpPr txBox="1"/>
-          <p:nvPr/>
-        </p:nvSpPr>
-        <p:spPr>
-          <a:xfrm>
-            <a:off x="1804836" y="2779776"/>
-            <a:ext cx="660890" cy="306324"/>
+          <p:cNvPr id="54" name="TextBox 53"/>
+          <p:cNvSpPr txBox="1"/>
+          <p:nvPr/>
+        </p:nvSpPr>
+        <p:spPr>
+          <a:xfrm>
+            <a:off x="1699406" y="2779776"/>
+            <a:ext cx="607011" cy="306324"/>
           </a:xfrm>
           <a:prstGeom prst="rect">
             <a:avLst/>
@@ -12300,7 +12104,7 @@
               </a:lnSpc>
             </a:pPr>
             <a:r>
-              <a:rPr sz="980" b="0">
+              <a:rPr sz="940" b="0">
                 <a:solidFill>
                   <a:srgbClr val="373D47"/>
                 </a:solidFill>
@@ -12315,14 +12119,14 @@
       </p:sp>
       <p:sp>
         <p:nvSpPr>
-          <p:cNvPr id="60" name="TextBox 59"/>
-          <p:cNvSpPr txBox="1"/>
-          <p:nvPr/>
-        </p:nvSpPr>
-        <p:spPr>
-          <a:xfrm>
-            <a:off x="2630319" y="2779776"/>
-            <a:ext cx="660890" cy="306324"/>
+          <p:cNvPr id="55" name="TextBox 54"/>
+          <p:cNvSpPr txBox="1"/>
+          <p:nvPr/>
+        </p:nvSpPr>
+        <p:spPr>
+          <a:xfrm>
+            <a:off x="2471009" y="2779776"/>
+            <a:ext cx="607011" cy="306324"/>
           </a:xfrm>
           <a:prstGeom prst="rect">
             <a:avLst/>
@@ -12341,7 +12145,7 @@
               </a:lnSpc>
             </a:pPr>
             <a:r>
-              <a:rPr sz="980" b="0">
+              <a:rPr sz="940" b="0">
                 <a:solidFill>
                   <a:srgbClr val="373D47"/>
                 </a:solidFill>
@@ -12356,14 +12160,14 @@
       </p:sp>
       <p:sp>
         <p:nvSpPr>
-          <p:cNvPr id="61" name="TextBox 60"/>
-          <p:cNvSpPr txBox="1"/>
-          <p:nvPr/>
-        </p:nvSpPr>
-        <p:spPr>
-          <a:xfrm>
-            <a:off x="3455801" y="2779776"/>
-            <a:ext cx="418102" cy="306324"/>
+          <p:cNvPr id="56" name="TextBox 55"/>
+          <p:cNvSpPr txBox="1"/>
+          <p:nvPr/>
+        </p:nvSpPr>
+        <p:spPr>
+          <a:xfrm>
+            <a:off x="3242613" y="2779776"/>
+            <a:ext cx="558786" cy="306324"/>
           </a:xfrm>
           <a:prstGeom prst="rect">
             <a:avLst/>
@@ -12382,7 +12186,7 @@
               </a:lnSpc>
             </a:pPr>
             <a:r>
-              <a:rPr sz="980" b="0">
+              <a:rPr sz="940" b="0">
                 <a:solidFill>
                   <a:srgbClr val="373D47"/>
                 </a:solidFill>
@@ -12390,21 +12194,21 @@
                 <a:ea typeface="Paperlogy 5 Medium"/>
                 <a:cs typeface="Paperlogy 5 Medium"/>
               </a:rPr>
-              <a:t>51</a:t>
-            </a:r>
-          </a:p>
-        </p:txBody>
-      </p:sp>
-      <p:sp>
-        <p:nvSpPr>
-          <p:cNvPr id="62" name="TextBox 61"/>
-          <p:cNvSpPr txBox="1"/>
-          <p:nvPr/>
-        </p:nvSpPr>
-        <p:spPr>
-          <a:xfrm>
-            <a:off x="4038495" y="2779776"/>
-            <a:ext cx="612333" cy="306324"/>
+              <a:t>44</a:t>
+            </a:r>
+          </a:p>
+        </p:txBody>
+      </p:sp>
+      <p:sp>
+        <p:nvSpPr>
+          <p:cNvPr id="57" name="TextBox 56"/>
+          <p:cNvSpPr txBox="1"/>
+          <p:nvPr/>
+        </p:nvSpPr>
+        <p:spPr>
+          <a:xfrm>
+            <a:off x="3965991" y="2779776"/>
+            <a:ext cx="1233939" cy="306324"/>
           </a:xfrm>
           <a:prstGeom prst="rect">
             <a:avLst/>
@@ -12423,29 +12227,29 @@
               </a:lnSpc>
             </a:pPr>
             <a:r>
-              <a:rPr sz="980" b="0">
-                <a:solidFill>
-                  <a:srgbClr val="373D47"/>
+              <a:rPr sz="940" b="0">
+                <a:solidFill>
+                  <a:srgbClr val="1E7A54"/>
                 </a:solidFill>
                 <a:latin typeface="Paperlogy 5 Medium"/>
                 <a:ea typeface="Paperlogy 5 Medium"/>
                 <a:cs typeface="Paperlogy 5 Medium"/>
               </a:rPr>
-              <a:t>54</a:t>
-            </a:r>
-          </a:p>
-        </p:txBody>
-      </p:sp>
-      <p:sp>
-        <p:nvSpPr>
-          <p:cNvPr id="63" name="TextBox 62"/>
-          <p:cNvSpPr txBox="1"/>
-          <p:nvPr/>
-        </p:nvSpPr>
-        <p:spPr>
-          <a:xfrm>
-            <a:off x="4815420" y="2779776"/>
-            <a:ext cx="952237" cy="306324"/>
+              <a:t>-0.13 ± 0.97</a:t>
+            </a:r>
+          </a:p>
+        </p:txBody>
+      </p:sp>
+      <p:sp>
+        <p:nvSpPr>
+          <p:cNvPr id="58" name="TextBox 57"/>
+          <p:cNvSpPr txBox="1"/>
+          <p:nvPr/>
+        </p:nvSpPr>
+        <p:spPr>
+          <a:xfrm>
+            <a:off x="5364522" y="2779776"/>
+            <a:ext cx="1041038" cy="306324"/>
           </a:xfrm>
           <a:prstGeom prst="rect">
             <a:avLst/>
@@ -12464,7 +12268,7 @@
               </a:lnSpc>
             </a:pPr>
             <a:r>
-              <a:rPr sz="980" b="0">
+              <a:rPr sz="940" b="0">
                 <a:solidFill>
                   <a:srgbClr val="373D47"/>
                 </a:solidFill>
@@ -12472,21 +12276,21 @@
                 <a:ea typeface="Paperlogy 5 Medium"/>
                 <a:cs typeface="Paperlogy 5 Medium"/>
               </a:rPr>
-              <a:t>-0.66 mm/년</a:t>
-            </a:r>
-          </a:p>
-        </p:txBody>
-      </p:sp>
-      <p:sp>
-        <p:nvSpPr>
-          <p:cNvPr id="64" name="TextBox 63"/>
-          <p:cNvSpPr txBox="1"/>
-          <p:nvPr/>
-        </p:nvSpPr>
-        <p:spPr>
-          <a:xfrm>
-            <a:off x="5932249" y="2779776"/>
-            <a:ext cx="515217" cy="306324"/>
+              <a:t>1.8 mm · 1.7월</a:t>
+            </a:r>
+          </a:p>
+        </p:txBody>
+      </p:sp>
+      <p:sp>
+        <p:nvSpPr>
+          <p:cNvPr id="59" name="TextBox 58"/>
+          <p:cNvSpPr txBox="1"/>
+          <p:nvPr/>
+        </p:nvSpPr>
+        <p:spPr>
+          <a:xfrm>
+            <a:off x="6570152" y="2779776"/>
+            <a:ext cx="799912" cy="306324"/>
           </a:xfrm>
           <a:prstGeom prst="rect">
             <a:avLst/>
@@ -12505,63 +12309,22 @@
               </a:lnSpc>
             </a:pPr>
             <a:r>
-              <a:rPr sz="980" b="0">
-                <a:solidFill>
-                  <a:srgbClr val="373D47"/>
+              <a:rPr sz="940" b="0">
+                <a:solidFill>
+                  <a:srgbClr val="6B7480"/>
                 </a:solidFill>
                 <a:latin typeface="Paperlogy 5 Medium"/>
                 <a:ea typeface="Paperlogy 5 Medium"/>
                 <a:cs typeface="Paperlogy 5 Medium"/>
               </a:rPr>
-              <a:t>0.854</a:t>
-            </a:r>
-          </a:p>
-        </p:txBody>
-      </p:sp>
-      <p:sp>
-        <p:nvSpPr>
-          <p:cNvPr id="65" name="TextBox 64"/>
-          <p:cNvSpPr txBox="1"/>
-          <p:nvPr/>
-        </p:nvSpPr>
-        <p:spPr>
-          <a:xfrm>
-            <a:off x="6612058" y="2779776"/>
-            <a:ext cx="758006" cy="306324"/>
-          </a:xfrm>
-          <a:prstGeom prst="rect">
-            <a:avLst/>
-          </a:prstGeom>
-          <a:noFill/>
-        </p:spPr>
-        <p:txBody>
-          <a:bodyPr wrap="square" anchor="ctr" lIns="0" rIns="0" tIns="0" bIns="0">
-            <a:spAutoFit/>
-          </a:bodyPr>
-          <a:lstStyle/>
-          <a:p>
-            <a:pPr algn="ctr">
-              <a:lnSpc>
-                <a:spcPct val="100000"/>
-              </a:lnSpc>
-            </a:pPr>
-            <a:r>
-              <a:rPr sz="980" b="0">
-                <a:solidFill>
-                  <a:srgbClr val="C0392B"/>
-                </a:solidFill>
-                <a:latin typeface="Paperlogy 5 Medium"/>
-                <a:ea typeface="Paperlogy 5 Medium"/>
-                <a:cs typeface="Paperlogy 5 Medium"/>
-              </a:rPr>
-              <a:t>보고 불가</a:t>
-            </a:r>
-          </a:p>
-        </p:txBody>
-      </p:sp>
-      <p:sp>
-        <p:nvSpPr>
-          <p:cNvPr id="66" name="Rectangle 65"/>
+              <a:t>계측 없음</a:t>
+            </a:r>
+          </a:p>
+        </p:txBody>
+      </p:sp>
+      <p:sp>
+        <p:nvSpPr>
+          <p:cNvPr id="60" name="Rectangle 59"/>
           <p:cNvSpPr/>
           <p:nvPr/>
         </p:nvSpPr>
@@ -12605,7 +12368,7 @@
       </p:sp>
       <p:sp>
         <p:nvSpPr>
-          <p:cNvPr id="67" name="Rectangle 66"/>
+          <p:cNvPr id="61" name="Rectangle 60"/>
           <p:cNvSpPr/>
           <p:nvPr/>
         </p:nvSpPr>
@@ -12649,14 +12412,14 @@
       </p:sp>
       <p:sp>
         <p:nvSpPr>
-          <p:cNvPr id="68" name="TextBox 67"/>
+          <p:cNvPr id="62" name="TextBox 61"/>
           <p:cNvSpPr txBox="1"/>
           <p:nvPr/>
         </p:nvSpPr>
         <p:spPr>
           <a:xfrm>
             <a:off x="493776" y="3086100"/>
-            <a:ext cx="1146468" cy="306324"/>
+            <a:ext cx="1041038" cy="306324"/>
           </a:xfrm>
           <a:prstGeom prst="rect">
             <a:avLst/>
@@ -12675,7 +12438,7 @@
               </a:lnSpc>
             </a:pPr>
             <a:r>
-              <a:rPr sz="980" b="1">
+              <a:rPr sz="940" b="1">
                 <a:solidFill>
                   <a:srgbClr val="373D47"/>
                 </a:solidFill>
@@ -12690,14 +12453,14 @@
       </p:sp>
       <p:sp>
         <p:nvSpPr>
-          <p:cNvPr id="69" name="TextBox 68"/>
-          <p:cNvSpPr txBox="1"/>
-          <p:nvPr/>
-        </p:nvSpPr>
-        <p:spPr>
-          <a:xfrm>
-            <a:off x="1804836" y="3086100"/>
-            <a:ext cx="660890" cy="306324"/>
+          <p:cNvPr id="63" name="TextBox 62"/>
+          <p:cNvSpPr txBox="1"/>
+          <p:nvPr/>
+        </p:nvSpPr>
+        <p:spPr>
+          <a:xfrm>
+            <a:off x="1699406" y="3086100"/>
+            <a:ext cx="607011" cy="306324"/>
           </a:xfrm>
           <a:prstGeom prst="rect">
             <a:avLst/>
@@ -12716,7 +12479,7 @@
               </a:lnSpc>
             </a:pPr>
             <a:r>
-              <a:rPr sz="980" b="0">
+              <a:rPr sz="940" b="0">
                 <a:solidFill>
                   <a:srgbClr val="373D47"/>
                 </a:solidFill>
@@ -12731,14 +12494,14 @@
       </p:sp>
       <p:sp>
         <p:nvSpPr>
-          <p:cNvPr id="70" name="TextBox 69"/>
-          <p:cNvSpPr txBox="1"/>
-          <p:nvPr/>
-        </p:nvSpPr>
-        <p:spPr>
-          <a:xfrm>
-            <a:off x="2630319" y="3086100"/>
-            <a:ext cx="660890" cy="306324"/>
+          <p:cNvPr id="64" name="TextBox 63"/>
+          <p:cNvSpPr txBox="1"/>
+          <p:nvPr/>
+        </p:nvSpPr>
+        <p:spPr>
+          <a:xfrm>
+            <a:off x="2471009" y="3086100"/>
+            <a:ext cx="607011" cy="306324"/>
           </a:xfrm>
           <a:prstGeom prst="rect">
             <a:avLst/>
@@ -12757,7 +12520,7 @@
               </a:lnSpc>
             </a:pPr>
             <a:r>
-              <a:rPr sz="980" b="0">
+              <a:rPr sz="940" b="0">
                 <a:solidFill>
                   <a:srgbClr val="373D47"/>
                 </a:solidFill>
@@ -12772,14 +12535,14 @@
       </p:sp>
       <p:sp>
         <p:nvSpPr>
-          <p:cNvPr id="71" name="TextBox 70"/>
-          <p:cNvSpPr txBox="1"/>
-          <p:nvPr/>
-        </p:nvSpPr>
-        <p:spPr>
-          <a:xfrm>
-            <a:off x="3455801" y="3086100"/>
-            <a:ext cx="418102" cy="306324"/>
+          <p:cNvPr id="65" name="TextBox 64"/>
+          <p:cNvSpPr txBox="1"/>
+          <p:nvPr/>
+        </p:nvSpPr>
+        <p:spPr>
+          <a:xfrm>
+            <a:off x="3242613" y="3086100"/>
+            <a:ext cx="558786" cy="306324"/>
           </a:xfrm>
           <a:prstGeom prst="rect">
             <a:avLst/>
@@ -12798,7 +12561,7 @@
               </a:lnSpc>
             </a:pPr>
             <a:r>
-              <a:rPr sz="980" b="0">
+              <a:rPr sz="940" b="0">
                 <a:solidFill>
                   <a:srgbClr val="373D47"/>
                 </a:solidFill>
@@ -12806,21 +12569,21 @@
                 <a:ea typeface="Paperlogy 5 Medium"/>
                 <a:cs typeface="Paperlogy 5 Medium"/>
               </a:rPr>
-              <a:t>51</a:t>
-            </a:r>
-          </a:p>
-        </p:txBody>
-      </p:sp>
-      <p:sp>
-        <p:nvSpPr>
-          <p:cNvPr id="72" name="TextBox 71"/>
-          <p:cNvSpPr txBox="1"/>
-          <p:nvPr/>
-        </p:nvSpPr>
-        <p:spPr>
-          <a:xfrm>
-            <a:off x="4038495" y="3086100"/>
-            <a:ext cx="612333" cy="306324"/>
+              <a:t>122</a:t>
+            </a:r>
+          </a:p>
+        </p:txBody>
+      </p:sp>
+      <p:sp>
+        <p:nvSpPr>
+          <p:cNvPr id="66" name="TextBox 65"/>
+          <p:cNvSpPr txBox="1"/>
+          <p:nvPr/>
+        </p:nvSpPr>
+        <p:spPr>
+          <a:xfrm>
+            <a:off x="3965991" y="3086100"/>
+            <a:ext cx="1233939" cy="306324"/>
           </a:xfrm>
           <a:prstGeom prst="rect">
             <a:avLst/>
@@ -12839,29 +12602,29 @@
               </a:lnSpc>
             </a:pPr>
             <a:r>
-              <a:rPr sz="980" b="0">
-                <a:solidFill>
-                  <a:srgbClr val="373D47"/>
+              <a:rPr sz="940" b="0">
+                <a:solidFill>
+                  <a:srgbClr val="1E7A54"/>
                 </a:solidFill>
                 <a:latin typeface="Paperlogy 5 Medium"/>
                 <a:ea typeface="Paperlogy 5 Medium"/>
                 <a:cs typeface="Paperlogy 5 Medium"/>
               </a:rPr>
-              <a:t>237</a:t>
-            </a:r>
-          </a:p>
-        </p:txBody>
-      </p:sp>
-      <p:sp>
-        <p:nvSpPr>
-          <p:cNvPr id="73" name="TextBox 72"/>
-          <p:cNvSpPr txBox="1"/>
-          <p:nvPr/>
-        </p:nvSpPr>
-        <p:spPr>
-          <a:xfrm>
-            <a:off x="4815420" y="3086100"/>
-            <a:ext cx="952237" cy="306324"/>
+              <a:t>+0.30 ± 0.90</a:t>
+            </a:r>
+          </a:p>
+        </p:txBody>
+      </p:sp>
+      <p:sp>
+        <p:nvSpPr>
+          <p:cNvPr id="67" name="TextBox 66"/>
+          <p:cNvSpPr txBox="1"/>
+          <p:nvPr/>
+        </p:nvSpPr>
+        <p:spPr>
+          <a:xfrm>
+            <a:off x="5364522" y="3086100"/>
+            <a:ext cx="1041038" cy="306324"/>
           </a:xfrm>
           <a:prstGeom prst="rect">
             <a:avLst/>
@@ -12880,7 +12643,7 @@
               </a:lnSpc>
             </a:pPr>
             <a:r>
-              <a:rPr sz="980" b="0">
+              <a:rPr sz="940" b="0">
                 <a:solidFill>
                   <a:srgbClr val="373D47"/>
                 </a:solidFill>
@@ -12888,21 +12651,21 @@
                 <a:ea typeface="Paperlogy 5 Medium"/>
                 <a:cs typeface="Paperlogy 5 Medium"/>
               </a:rPr>
-              <a:t>-0.23 mm/년</a:t>
-            </a:r>
-          </a:p>
-        </p:txBody>
-      </p:sp>
-      <p:sp>
-        <p:nvSpPr>
-          <p:cNvPr id="74" name="TextBox 73"/>
-          <p:cNvSpPr txBox="1"/>
-          <p:nvPr/>
-        </p:nvSpPr>
-        <p:spPr>
-          <a:xfrm>
-            <a:off x="5932249" y="3086100"/>
-            <a:ext cx="515217" cy="306324"/>
+              <a:t>3.4 mm · 8.7월</a:t>
+            </a:r>
+          </a:p>
+        </p:txBody>
+      </p:sp>
+      <p:sp>
+        <p:nvSpPr>
+          <p:cNvPr id="68" name="TextBox 67"/>
+          <p:cNvSpPr txBox="1"/>
+          <p:nvPr/>
+        </p:nvSpPr>
+        <p:spPr>
+          <a:xfrm>
+            <a:off x="6570152" y="3086100"/>
+            <a:ext cx="799912" cy="306324"/>
           </a:xfrm>
           <a:prstGeom prst="rect">
             <a:avLst/>
@@ -12921,63 +12684,22 @@
               </a:lnSpc>
             </a:pPr>
             <a:r>
-              <a:rPr sz="980" b="0">
-                <a:solidFill>
-                  <a:srgbClr val="373D47"/>
+              <a:rPr sz="940" b="0">
+                <a:solidFill>
+                  <a:srgbClr val="6B7480"/>
                 </a:solidFill>
                 <a:latin typeface="Paperlogy 5 Medium"/>
                 <a:ea typeface="Paperlogy 5 Medium"/>
                 <a:cs typeface="Paperlogy 5 Medium"/>
               </a:rPr>
-              <a:t>0.809</a:t>
-            </a:r>
-          </a:p>
-        </p:txBody>
-      </p:sp>
-      <p:sp>
-        <p:nvSpPr>
-          <p:cNvPr id="75" name="TextBox 74"/>
-          <p:cNvSpPr txBox="1"/>
-          <p:nvPr/>
-        </p:nvSpPr>
-        <p:spPr>
-          <a:xfrm>
-            <a:off x="6612058" y="3086100"/>
-            <a:ext cx="758006" cy="306324"/>
-          </a:xfrm>
-          <a:prstGeom prst="rect">
-            <a:avLst/>
-          </a:prstGeom>
-          <a:noFill/>
-        </p:spPr>
-        <p:txBody>
-          <a:bodyPr wrap="square" anchor="ctr" lIns="0" rIns="0" tIns="0" bIns="0">
-            <a:spAutoFit/>
-          </a:bodyPr>
-          <a:lstStyle/>
-          <a:p>
-            <a:pPr algn="ctr">
-              <a:lnSpc>
-                <a:spcPct val="100000"/>
-              </a:lnSpc>
-            </a:pPr>
-            <a:r>
-              <a:rPr sz="980" b="0">
-                <a:solidFill>
-                  <a:srgbClr val="ED6C00"/>
-                </a:solidFill>
-                <a:latin typeface="Paperlogy 5 Medium"/>
-                <a:ea typeface="Paperlogy 5 Medium"/>
-                <a:cs typeface="Paperlogy 5 Medium"/>
-              </a:rPr>
-              <a:t>조건부</a:t>
-            </a:r>
-          </a:p>
-        </p:txBody>
-      </p:sp>
-      <p:sp>
-        <p:nvSpPr>
-          <p:cNvPr id="76" name="Rectangle 75"/>
+              <a:t>계측 없음</a:t>
+            </a:r>
+          </a:p>
+        </p:txBody>
+      </p:sp>
+      <p:sp>
+        <p:nvSpPr>
+          <p:cNvPr id="69" name="Rectangle 68"/>
           <p:cNvSpPr/>
           <p:nvPr/>
         </p:nvSpPr>
@@ -13021,14 +12743,14 @@
       </p:sp>
       <p:sp>
         <p:nvSpPr>
-          <p:cNvPr id="77" name="TextBox 76"/>
+          <p:cNvPr id="70" name="TextBox 69"/>
           <p:cNvSpPr txBox="1"/>
           <p:nvPr/>
         </p:nvSpPr>
         <p:spPr>
           <a:xfrm>
             <a:off x="493776" y="3392424"/>
-            <a:ext cx="1146468" cy="306324"/>
+            <a:ext cx="1041038" cy="306324"/>
           </a:xfrm>
           <a:prstGeom prst="rect">
             <a:avLst/>
@@ -13047,7 +12769,7 @@
               </a:lnSpc>
             </a:pPr>
             <a:r>
-              <a:rPr sz="980" b="1">
+              <a:rPr sz="940" b="1">
                 <a:solidFill>
                   <a:srgbClr val="373D47"/>
                 </a:solidFill>
@@ -13062,14 +12784,14 @@
       </p:sp>
       <p:sp>
         <p:nvSpPr>
-          <p:cNvPr id="78" name="TextBox 77"/>
-          <p:cNvSpPr txBox="1"/>
-          <p:nvPr/>
-        </p:nvSpPr>
-        <p:spPr>
-          <a:xfrm>
-            <a:off x="1804836" y="3392424"/>
-            <a:ext cx="660890" cy="306324"/>
+          <p:cNvPr id="71" name="TextBox 70"/>
+          <p:cNvSpPr txBox="1"/>
+          <p:nvPr/>
+        </p:nvSpPr>
+        <p:spPr>
+          <a:xfrm>
+            <a:off x="1699406" y="3392424"/>
+            <a:ext cx="607011" cy="306324"/>
           </a:xfrm>
           <a:prstGeom prst="rect">
             <a:avLst/>
@@ -13088,7 +12810,7 @@
               </a:lnSpc>
             </a:pPr>
             <a:r>
-              <a:rPr sz="980" b="0">
+              <a:rPr sz="940" b="0">
                 <a:solidFill>
                   <a:srgbClr val="373D47"/>
                 </a:solidFill>
@@ -13103,14 +12825,14 @@
       </p:sp>
       <p:sp>
         <p:nvSpPr>
-          <p:cNvPr id="79" name="TextBox 78"/>
-          <p:cNvSpPr txBox="1"/>
-          <p:nvPr/>
-        </p:nvSpPr>
-        <p:spPr>
-          <a:xfrm>
-            <a:off x="2630319" y="3392424"/>
-            <a:ext cx="660890" cy="306324"/>
+          <p:cNvPr id="72" name="TextBox 71"/>
+          <p:cNvSpPr txBox="1"/>
+          <p:nvPr/>
+        </p:nvSpPr>
+        <p:spPr>
+          <a:xfrm>
+            <a:off x="2471009" y="3392424"/>
+            <a:ext cx="607011" cy="306324"/>
           </a:xfrm>
           <a:prstGeom prst="rect">
             <a:avLst/>
@@ -13129,7 +12851,7 @@
               </a:lnSpc>
             </a:pPr>
             <a:r>
-              <a:rPr sz="980" b="0">
+              <a:rPr sz="940" b="0">
                 <a:solidFill>
                   <a:srgbClr val="373D47"/>
                 </a:solidFill>
@@ -13144,14 +12866,14 @@
       </p:sp>
       <p:sp>
         <p:nvSpPr>
-          <p:cNvPr id="80" name="TextBox 79"/>
-          <p:cNvSpPr txBox="1"/>
-          <p:nvPr/>
-        </p:nvSpPr>
-        <p:spPr>
-          <a:xfrm>
-            <a:off x="3455801" y="3392424"/>
-            <a:ext cx="418102" cy="306324"/>
+          <p:cNvPr id="73" name="TextBox 72"/>
+          <p:cNvSpPr txBox="1"/>
+          <p:nvPr/>
+        </p:nvSpPr>
+        <p:spPr>
+          <a:xfrm>
+            <a:off x="3242613" y="3392424"/>
+            <a:ext cx="558786" cy="306324"/>
           </a:xfrm>
           <a:prstGeom prst="rect">
             <a:avLst/>
@@ -13170,7 +12892,7 @@
               </a:lnSpc>
             </a:pPr>
             <a:r>
-              <a:rPr sz="980" b="0">
+              <a:rPr sz="940" b="0">
                 <a:solidFill>
                   <a:srgbClr val="373D47"/>
                 </a:solidFill>
@@ -13178,21 +12900,21 @@
                 <a:ea typeface="Paperlogy 5 Medium"/>
                 <a:cs typeface="Paperlogy 5 Medium"/>
               </a:rPr>
-              <a:t>29</a:t>
-            </a:r>
-          </a:p>
-        </p:txBody>
-      </p:sp>
-      <p:sp>
-        <p:nvSpPr>
-          <p:cNvPr id="81" name="TextBox 80"/>
-          <p:cNvSpPr txBox="1"/>
-          <p:nvPr/>
-        </p:nvSpPr>
-        <p:spPr>
-          <a:xfrm>
-            <a:off x="4038495" y="3392424"/>
-            <a:ext cx="612333" cy="306324"/>
+              <a:t>41</a:t>
+            </a:r>
+          </a:p>
+        </p:txBody>
+      </p:sp>
+      <p:sp>
+        <p:nvSpPr>
+          <p:cNvPr id="74" name="TextBox 73"/>
+          <p:cNvSpPr txBox="1"/>
+          <p:nvPr/>
+        </p:nvSpPr>
+        <p:spPr>
+          <a:xfrm>
+            <a:off x="3965991" y="3392424"/>
+            <a:ext cx="1233939" cy="306324"/>
           </a:xfrm>
           <a:prstGeom prst="rect">
             <a:avLst/>
@@ -13211,29 +12933,29 @@
               </a:lnSpc>
             </a:pPr>
             <a:r>
-              <a:rPr sz="980" b="0">
-                <a:solidFill>
-                  <a:srgbClr val="373D47"/>
+              <a:rPr sz="940" b="0">
+                <a:solidFill>
+                  <a:srgbClr val="1E7A54"/>
                 </a:solidFill>
                 <a:latin typeface="Paperlogy 5 Medium"/>
                 <a:ea typeface="Paperlogy 5 Medium"/>
                 <a:cs typeface="Paperlogy 5 Medium"/>
               </a:rPr>
-              <a:t>82</a:t>
-            </a:r>
-          </a:p>
-        </p:txBody>
-      </p:sp>
-      <p:sp>
-        <p:nvSpPr>
-          <p:cNvPr id="82" name="TextBox 81"/>
-          <p:cNvSpPr txBox="1"/>
-          <p:nvPr/>
-        </p:nvSpPr>
-        <p:spPr>
-          <a:xfrm>
-            <a:off x="4815420" y="3392424"/>
-            <a:ext cx="952237" cy="306324"/>
+              <a:t>-4.41 ± 4.56</a:t>
+            </a:r>
+          </a:p>
+        </p:txBody>
+      </p:sp>
+      <p:sp>
+        <p:nvSpPr>
+          <p:cNvPr id="75" name="TextBox 74"/>
+          <p:cNvSpPr txBox="1"/>
+          <p:nvPr/>
+        </p:nvSpPr>
+        <p:spPr>
+          <a:xfrm>
+            <a:off x="5364522" y="3392424"/>
+            <a:ext cx="1041038" cy="306324"/>
           </a:xfrm>
           <a:prstGeom prst="rect">
             <a:avLst/>
@@ -13252,7 +12974,7 @@
               </a:lnSpc>
             </a:pPr>
             <a:r>
-              <a:rPr sz="980" b="0">
+              <a:rPr sz="940" b="0">
                 <a:solidFill>
                   <a:srgbClr val="373D47"/>
                 </a:solidFill>
@@ -13260,21 +12982,21 @@
                 <a:ea typeface="Paperlogy 5 Medium"/>
                 <a:cs typeface="Paperlogy 5 Medium"/>
               </a:rPr>
-              <a:t>-4.26 mm/년</a:t>
-            </a:r>
-          </a:p>
-        </p:txBody>
-      </p:sp>
-      <p:sp>
-        <p:nvSpPr>
-          <p:cNvPr id="83" name="TextBox 82"/>
-          <p:cNvSpPr txBox="1"/>
-          <p:nvPr/>
-        </p:nvSpPr>
-        <p:spPr>
-          <a:xfrm>
-            <a:off x="5932249" y="3392424"/>
-            <a:ext cx="515217" cy="306324"/>
+              <a:t>9.7 mm · 1.8월</a:t>
+            </a:r>
+          </a:p>
+        </p:txBody>
+      </p:sp>
+      <p:sp>
+        <p:nvSpPr>
+          <p:cNvPr id="76" name="TextBox 75"/>
+          <p:cNvSpPr txBox="1"/>
+          <p:nvPr/>
+        </p:nvSpPr>
+        <p:spPr>
+          <a:xfrm>
+            <a:off x="6570152" y="3392424"/>
+            <a:ext cx="799912" cy="306324"/>
           </a:xfrm>
           <a:prstGeom prst="rect">
             <a:avLst/>
@@ -13293,63 +13015,22 @@
               </a:lnSpc>
             </a:pPr>
             <a:r>
-              <a:rPr sz="980" b="0">
-                <a:solidFill>
-                  <a:srgbClr val="373D47"/>
+              <a:rPr sz="940" b="0">
+                <a:solidFill>
+                  <a:srgbClr val="C0392B"/>
                 </a:solidFill>
                 <a:latin typeface="Paperlogy 5 Medium"/>
                 <a:ea typeface="Paperlogy 5 Medium"/>
                 <a:cs typeface="Paperlogy 5 Medium"/>
               </a:rPr>
-              <a:t>0.929</a:t>
-            </a:r>
-          </a:p>
-        </p:txBody>
-      </p:sp>
-      <p:sp>
-        <p:nvSpPr>
-          <p:cNvPr id="84" name="TextBox 83"/>
-          <p:cNvSpPr txBox="1"/>
-          <p:nvPr/>
-        </p:nvSpPr>
-        <p:spPr>
-          <a:xfrm>
-            <a:off x="6612058" y="3392424"/>
-            <a:ext cx="758006" cy="306324"/>
-          </a:xfrm>
-          <a:prstGeom prst="rect">
-            <a:avLst/>
-          </a:prstGeom>
-          <a:noFill/>
-        </p:spPr>
-        <p:txBody>
-          <a:bodyPr wrap="square" anchor="ctr" lIns="0" rIns="0" tIns="0" bIns="0">
-            <a:spAutoFit/>
-          </a:bodyPr>
-          <a:lstStyle/>
-          <a:p>
-            <a:pPr algn="ctr">
-              <a:lnSpc>
-                <a:spcPct val="100000"/>
-              </a:lnSpc>
-            </a:pPr>
-            <a:r>
-              <a:rPr sz="980" b="0">
-                <a:solidFill>
-                  <a:srgbClr val="C0392B"/>
-                </a:solidFill>
-                <a:latin typeface="Paperlogy 5 Medium"/>
-                <a:ea typeface="Paperlogy 5 Medium"/>
-                <a:cs typeface="Paperlogy 5 Medium"/>
-              </a:rPr>
-              <a:t>보고 불가</a:t>
-            </a:r>
-          </a:p>
-        </p:txBody>
-      </p:sp>
-      <p:sp>
-        <p:nvSpPr>
-          <p:cNvPr id="85" name="Rectangle 84"/>
+              <a:t>+5.8개월</a:t>
+            </a:r>
+          </a:p>
+        </p:txBody>
+      </p:sp>
+      <p:sp>
+        <p:nvSpPr>
+          <p:cNvPr id="77" name="Rectangle 76"/>
           <p:cNvSpPr/>
           <p:nvPr/>
         </p:nvSpPr>
@@ -13393,7 +13074,7 @@
       </p:sp>
       <p:sp>
         <p:nvSpPr>
-          <p:cNvPr id="86" name="Rectangle 85"/>
+          <p:cNvPr id="78" name="Rectangle 77"/>
           <p:cNvSpPr/>
           <p:nvPr/>
         </p:nvSpPr>
@@ -13439,7 +13120,7 @@
       </p:sp>
       <p:pic>
         <p:nvPicPr>
-          <p:cNvPr id="87" name="Picture 86" descr="hangang_지도_화면.png"/>
+          <p:cNvPr id="79" name="Picture 78" descr="hangang_지도_화면.png"/>
           <p:cNvPicPr>
             <a:picLocks noChangeAspect="1"/>
           </p:cNvPicPr>
@@ -13463,7 +13144,7 @@
       </p:pic>
       <p:sp>
         <p:nvSpPr>
-          <p:cNvPr id="88" name="Rectangle 87"/>
+          <p:cNvPr id="80" name="Rectangle 79"/>
           <p:cNvSpPr/>
           <p:nvPr/>
         </p:nvSpPr>
@@ -13509,7 +13190,7 @@
       </p:sp>
       <p:sp>
         <p:nvSpPr>
-          <p:cNvPr id="89" name="Rectangle 88"/>
+          <p:cNvPr id="81" name="Rectangle 80"/>
           <p:cNvSpPr/>
           <p:nvPr/>
         </p:nvSpPr>
@@ -13553,7 +13234,7 @@
       </p:sp>
       <p:sp>
         <p:nvSpPr>
-          <p:cNvPr id="90" name="TextBox 89"/>
+          <p:cNvPr id="82" name="TextBox 81"/>
           <p:cNvSpPr txBox="1"/>
           <p:nvPr/>
         </p:nvSpPr>
@@ -13594,7 +13275,7 @@
       </p:sp>
       <p:sp>
         <p:nvSpPr>
-          <p:cNvPr id="91" name="TextBox 90"/>
+          <p:cNvPr id="83" name="TextBox 82"/>
           <p:cNvSpPr txBox="1"/>
           <p:nvPr/>
         </p:nvSpPr>
@@ -13737,7 +13418,7 @@
       </p:sp>
       <p:sp>
         <p:nvSpPr>
-          <p:cNvPr id="92" name="TextBox 91"/>
+          <p:cNvPr id="84" name="TextBox 83"/>
           <p:cNvSpPr txBox="1"/>
           <p:nvPr/>
         </p:nvSpPr>
@@ -13782,7 +13463,7 @@
                 <a:ea typeface="Paperlogy 7 Bold"/>
                 <a:cs typeface="Paperlogy 7 Bold"/>
               </a:rPr>
-              <a:t>brief.png · chain.png </a:t>
+              <a:t>교면전용.json · png </a:t>
             </a:r>
             <a:r>
               <a:rPr sz="980" b="0">
@@ -13793,7 +13474,7 @@
                 <a:ea typeface="Paperlogy 5 Medium"/>
                 <a:cs typeface="Paperlogy 5 Medium"/>
               </a:rPr>
-              <a:t>— 평면 · 종단 · 측점</a:t>
+              <a:t>— 재선별 결과와 GNSS 대조</a:t>
             </a:r>
           </a:p>
           <a:p>
@@ -13880,7 +13561,7 @@
       </p:sp>
       <p:sp>
         <p:nvSpPr>
-          <p:cNvPr id="93" name="Rectangle 92"/>
+          <p:cNvPr id="85" name="Rectangle 84"/>
           <p:cNvSpPr/>
           <p:nvPr/>
         </p:nvSpPr>
@@ -13926,7 +13607,7 @@
       </p:sp>
       <p:sp>
         <p:nvSpPr>
-          <p:cNvPr id="94" name="Rectangle 93"/>
+          <p:cNvPr id="86" name="Rectangle 85"/>
           <p:cNvSpPr/>
           <p:nvPr/>
         </p:nvSpPr>
@@ -13970,7 +13651,7 @@
       </p:sp>
       <p:sp>
         <p:nvSpPr>
-          <p:cNvPr id="95" name="TextBox 94"/>
+          <p:cNvPr id="87" name="TextBox 86"/>
           <p:cNvSpPr txBox="1"/>
           <p:nvPr/>
         </p:nvSpPr>
@@ -14011,7 +13692,7 @@
       </p:sp>
       <p:sp>
         <p:nvSpPr>
-          <p:cNvPr id="96" name="TextBox 95"/>
+          <p:cNvPr id="88" name="TextBox 87"/>
           <p:cNvSpPr txBox="1"/>
           <p:nvPr/>
         </p:nvSpPr>
@@ -14092,7 +13773,7 @@
       </p:sp>
       <p:sp>
         <p:nvSpPr>
-          <p:cNvPr id="97" name="Rectangle 96"/>
+          <p:cNvPr id="89" name="Rectangle 88"/>
           <p:cNvSpPr/>
           <p:nvPr/>
         </p:nvSpPr>
@@ -14136,7 +13817,7 @@
       </p:sp>
       <p:sp>
         <p:nvSpPr>
-          <p:cNvPr id="98" name="Rectangle 97"/>
+          <p:cNvPr id="90" name="Rectangle 89"/>
           <p:cNvSpPr/>
           <p:nvPr/>
         </p:nvSpPr>
@@ -14180,7 +13861,7 @@
       </p:sp>
       <p:sp>
         <p:nvSpPr>
-          <p:cNvPr id="99" name="TextBox 98"/>
+          <p:cNvPr id="91" name="TextBox 90"/>
           <p:cNvSpPr txBox="1"/>
           <p:nvPr/>
         </p:nvSpPr>
@@ -14214,14 +13895,14 @@
                 <a:ea typeface="Paperlogy 7 Bold"/>
                 <a:cs typeface="Paperlogy 7 Bold"/>
               </a:rPr>
-              <a:t>감사 결과가 '보고 불가'인 곳이 더 많다 — 숨기지 않는다. 판정을 자동으로 붙이는 것 자체가 산출물이다</a:t>
-            </a:r>
-          </a:p>
-        </p:txBody>
-      </p:sp>
-      <p:sp>
-        <p:nvSpPr>
-          <p:cNvPr id="100" name="TextBox 99"/>
+              <a:t>교면만 남기면 7개소 중 6개소의 속도 95% 구간이 0 을 품는다 — 유의한 추세가 없다. 숨기지 않고 그대로 싣는다</a:t>
+            </a:r>
+          </a:p>
+        </p:txBody>
+      </p:sp>
+      <p:sp>
+        <p:nvSpPr>
+          <p:cNvPr id="92" name="TextBox 91"/>
           <p:cNvSpPr txBox="1"/>
           <p:nvPr/>
         </p:nvSpPr>
@@ -14255,14 +13936,14 @@
                 <a:ea typeface="Paperlogy 5 Medium"/>
                 <a:cs typeface="Paperlogy 5 Medium"/>
               </a:rPr>
-              <a:t>※ 표의 모든 값은 각 교량 폴더의 bridge.json · 결과.md · project.h5 에서 직접 읽었다. '감사' 는 관측 조건이 기준 학습 조건과 얼마나 다른지를 보고 자동으로 붙는 판정이며, 구조 상태 등급이 아니다.</a:t>
-            </a:r>
-          </a:p>
-        </p:txBody>
-      </p:sp>
-      <p:sp>
-        <p:nvSpPr>
-          <p:cNvPr id="101" name="Rectangle 100"/>
+              <a:t>※ 표의 값은 '교면 전용 재선별'(회랑 ±폭/2 · 코히런스로 밀림 되돌림 · 지반 공통성분 제거) 결과다 — 교량별 교면전용.json 에서 직접 읽었다. 예전 ±30 m 선별 값은 강변 지반이 섞여 있어 쓰지 않는다. 속도는 초록이 '0 을 품음', GNSS 대조는 |1.5개월| 안이면 같은 계절 거동.</a:t>
+            </a:r>
+          </a:p>
+        </p:txBody>
+      </p:sp>
+      <p:sp>
+        <p:nvSpPr>
+          <p:cNvPr id="93" name="Rectangle 92"/>
           <p:cNvSpPr/>
           <p:nvPr/>
         </p:nvSpPr>
@@ -14306,7 +13987,7 @@
       </p:sp>
       <p:sp>
         <p:nvSpPr>
-          <p:cNvPr id="102" name="TextBox 101"/>
+          <p:cNvPr id="94" name="TextBox 93"/>
           <p:cNvSpPr txBox="1"/>
           <p:nvPr/>
         </p:nvSpPr>
@@ -14347,7 +14028,7 @@
       </p:sp>
       <p:sp>
         <p:nvSpPr>
-          <p:cNvPr id="103" name="Rectangle 102"/>
+          <p:cNvPr id="95" name="Rectangle 94"/>
           <p:cNvSpPr/>
           <p:nvPr/>
         </p:nvSpPr>
@@ -14391,7 +14072,7 @@
       </p:sp>
       <p:sp>
         <p:nvSpPr>
-          <p:cNvPr id="104" name="TextBox 103"/>
+          <p:cNvPr id="96" name="TextBox 95"/>
           <p:cNvSpPr txBox="1"/>
           <p:nvPr/>
         </p:nvSpPr>
@@ -19044,7 +18725,7 @@
                 <a:ea typeface="Paperlogy 5 Medium"/>
                 <a:cs typeface="Paperlogy 5 Medium"/>
               </a:rPr>
-              <a:t>※ 올림픽대교 예시. 두 그림 모두 project.h5 의 insar/velocity_mm_yr · fram/CRI 를 그대로 읽어 그렸고, 회색 윤곽은 같은 좌표계의 IFC 부재다. CRI 색 위끝은 자료에 맞춰 잡았다(0~1 고정 아님).</a:t>
+              <a:t>※ 올림픽대교 예시 — 보여 주는 것은 '값을 부재에 얹는 방식' 이다. 이 두 그림의 점은 ③④장과 달리 **예전 ±30 m 선별**이라 교면 전용이 아니다(교면만 남기면 점이 10~122개로 줄어 3D 로는 성기다). 두 그림 모두 project.h5 의 insar/velocity_mm_yr · fram/CRI 를 그대로 읽었고, 회색 윤곽은 같은 좌표계의 IFC 부재다.</a:t>
             </a:r>
           </a:p>
         </p:txBody>

--- a/docs/KICT_Bmaps_연계가치_7p.pptx
+++ b/docs/KICT_Bmaps_연계가치_7p.pptx
@@ -9152,7 +9152,7 @@
         <p:spPr>
           <a:xfrm>
             <a:off x="411480" y="1170432"/>
-            <a:ext cx="11368735" cy="2889504"/>
+            <a:ext cx="6766560" cy="2889504"/>
           </a:xfrm>
           <a:prstGeom prst="rect">
             <a:avLst/>
@@ -9205,8 +9205,8 @@
         </p:blipFill>
         <p:spPr>
           <a:xfrm>
-            <a:off x="1610835" y="1216152"/>
-            <a:ext cx="8970025" cy="2798064"/>
+            <a:off x="457200" y="1574083"/>
+            <a:ext cx="6675120" cy="2082203"/>
           </a:xfrm>
           <a:prstGeom prst="rect">
             <a:avLst/>
@@ -9221,8 +9221,8 @@
         </p:nvSpPr>
         <p:spPr>
           <a:xfrm>
-            <a:off x="411480" y="4224528"/>
-            <a:ext cx="11368735" cy="1188720"/>
+            <a:off x="7360920" y="1170432"/>
+            <a:ext cx="4419295" cy="2889504"/>
           </a:xfrm>
           <a:prstGeom prst="rect">
             <a:avLst/>
@@ -9259,9 +9259,79 @@
           </a:p>
         </p:txBody>
       </p:sp>
-      <p:sp>
-        <p:nvSpPr>
-          <p:cNvPr id="14" name="Rectangle 13"/>
+      <p:pic>
+        <p:nvPicPr>
+          <p:cNvPr id="14" name="Picture 13" descr="MTInSAR_요약.png"/>
+          <p:cNvPicPr>
+            <a:picLocks noChangeAspect="1"/>
+          </p:cNvPicPr>
+          <p:nvPr/>
+        </p:nvPicPr>
+        <p:blipFill>
+          <a:blip r:embed="rId3"/>
+          <a:stretch>
+            <a:fillRect/>
+          </a:stretch>
+        </p:blipFill>
+        <p:spPr>
+          <a:xfrm>
+            <a:off x="7552404" y="1216152"/>
+            <a:ext cx="4036327" cy="2798064"/>
+          </a:xfrm>
+          <a:prstGeom prst="rect">
+            <a:avLst/>
+          </a:prstGeom>
+        </p:spPr>
+      </p:pic>
+      <p:sp>
+        <p:nvSpPr>
+          <p:cNvPr id="15" name="Rectangle 14"/>
+          <p:cNvSpPr/>
+          <p:nvPr/>
+        </p:nvSpPr>
+        <p:spPr>
+          <a:xfrm>
+            <a:off x="411480" y="4224528"/>
+            <a:ext cx="11368735" cy="1188720"/>
+          </a:xfrm>
+          <a:prstGeom prst="rect">
+            <a:avLst/>
+          </a:prstGeom>
+          <a:solidFill>
+            <a:srgbClr val="FFFFFF"/>
+          </a:solidFill>
+          <a:ln w="12700">
+            <a:solidFill>
+              <a:srgbClr val="E9EBEE"/>
+            </a:solidFill>
+          </a:ln>
+          <a:effectLst/>
+        </p:spPr>
+        <p:style>
+          <a:lnRef idx="1">
+            <a:schemeClr val="accent1"/>
+          </a:lnRef>
+          <a:fillRef idx="3">
+            <a:schemeClr val="accent1"/>
+          </a:fillRef>
+          <a:effectRef idx="2">
+            <a:schemeClr val="accent1"/>
+          </a:effectRef>
+          <a:fontRef idx="minor">
+            <a:schemeClr val="lt1"/>
+          </a:fontRef>
+        </p:style>
+        <p:txBody>
+          <a:bodyPr rtlCol="0" anchor="ctr"/>
+          <a:lstStyle/>
+          <a:p>
+            <a:pPr algn="ctr"/>
+          </a:p>
+        </p:txBody>
+      </p:sp>
+      <p:sp>
+        <p:nvSpPr>
+          <p:cNvPr id="16" name="Rectangle 15"/>
           <p:cNvSpPr/>
           <p:nvPr/>
         </p:nvSpPr>
@@ -9305,7 +9375,7 @@
       </p:sp>
       <p:sp>
         <p:nvSpPr>
-          <p:cNvPr id="15" name="TextBox 14"/>
+          <p:cNvPr id="17" name="TextBox 16"/>
           <p:cNvSpPr txBox="1"/>
           <p:nvPr/>
         </p:nvSpPr>
@@ -9346,7 +9416,7 @@
       </p:sp>
       <p:sp>
         <p:nvSpPr>
-          <p:cNvPr id="16" name="TextBox 15"/>
+          <p:cNvPr id="18" name="TextBox 17"/>
           <p:cNvSpPr txBox="1"/>
           <p:nvPr/>
         </p:nvSpPr>
@@ -9449,7 +9519,7 @@
       </p:sp>
       <p:sp>
         <p:nvSpPr>
-          <p:cNvPr id="17" name="TextBox 16"/>
+          <p:cNvPr id="19" name="TextBox 18"/>
           <p:cNvSpPr txBox="1"/>
           <p:nvPr/>
         </p:nvSpPr>
@@ -9505,7 +9575,7 @@
                 <a:ea typeface="Paperlogy 5 Medium"/>
                 <a:cs typeface="Paperlogy 5 Medium"/>
               </a:rPr>
-              <a:t>한강 15개소 중 11개소에서 교량 위 점의 계절 위상이 100~200 m 떨어진 맨땅과 1.5개월 안으로 같다</a:t>
+              <a:t>한강 15개소 중 11개소에서 교량 위 점의 계절 위상이 100~200 m 떨어진 맨땅과 1.5개월 안으로 같다 — 지반을 봤다</a:t>
             </a:r>
           </a:p>
           <a:p>
@@ -9534,7 +9604,7 @@
                 <a:ea typeface="Paperlogy 7 Bold"/>
                 <a:cs typeface="Paperlogy 7 Bold"/>
               </a:rPr>
-              <a:t>즉 </a:t>
+              <a:t>그래서 MT-InSAR 를 넣었다 </a:t>
             </a:r>
             <a:r>
               <a:rPr sz="1019" b="0">
@@ -9545,14 +9615,14 @@
                 <a:ea typeface="Paperlogy 5 Medium"/>
                 <a:cs typeface="Paperlogy 5 Medium"/>
               </a:rPr>
-              <a:t>교면 점이 10~122개뿐이고 그마저 주변 지반과 섞여 있다 — 통계가 아니라 분해능 문제다</a:t>
-            </a:r>
-          </a:p>
-        </p:txBody>
-      </p:sp>
-      <p:sp>
-        <p:nvSpPr>
-          <p:cNvPr id="18" name="Rectangle 17"/>
+              <a:t>ADI·기선망·점별 DEM 오차·APS. 잔차가 전 교량에서 줄고(행주 29→18 mm), σ_Δh 가 26 → 8~13 m, 3개소에서 교면 열팽창이 지반과 갈라진다</a:t>
+            </a:r>
+          </a:p>
+        </p:txBody>
+      </p:sp>
+      <p:sp>
+        <p:nvSpPr>
+          <p:cNvPr id="20" name="Rectangle 19"/>
           <p:cNvSpPr/>
           <p:nvPr/>
         </p:nvSpPr>
@@ -9596,7 +9666,7 @@
       </p:sp>
       <p:sp>
         <p:nvSpPr>
-          <p:cNvPr id="19" name="Rectangle 18"/>
+          <p:cNvPr id="21" name="Rectangle 20"/>
           <p:cNvSpPr/>
           <p:nvPr/>
         </p:nvSpPr>
@@ -9640,7 +9710,7 @@
       </p:sp>
       <p:sp>
         <p:nvSpPr>
-          <p:cNvPr id="20" name="TextBox 19"/>
+          <p:cNvPr id="22" name="TextBox 21"/>
           <p:cNvSpPr txBox="1"/>
           <p:nvPr/>
         </p:nvSpPr>
@@ -9674,14 +9744,14 @@
                 <a:ea typeface="Paperlogy 7 Bold"/>
                 <a:cs typeface="Paperlogy 7 Bold"/>
               </a:rPr>
-              <a:t>Sentinel-1 은 지상 5×20 m, 데크 폭은 1~2 화소다 — 지금 낸 것은 '맞는다' 가 아니라 '무엇이 있어야 맞출 수 있는가' 다</a:t>
-            </a:r>
-          </a:p>
-        </p:txBody>
-      </p:sp>
-      <p:sp>
-        <p:nvSpPr>
-          <p:cNvPr id="21" name="TextBox 20"/>
+              <a:t>처리를 고치니 교면이 갈라지기 시작했다 — 남은 벽은 분해능이다(Sentinel-1 5×20 m · 데크 폭 1~2 화소)</a:t>
+            </a:r>
+          </a:p>
+        </p:txBody>
+      </p:sp>
+      <p:sp>
+        <p:nvSpPr>
+          <p:cNvPr id="23" name="TextBox 22"/>
           <p:cNvSpPr txBox="1"/>
           <p:nvPr/>
         </p:nvSpPr>
@@ -9722,7 +9792,7 @@
       </p:sp>
       <p:sp>
         <p:nvSpPr>
-          <p:cNvPr id="22" name="Rectangle 21"/>
+          <p:cNvPr id="24" name="Rectangle 23"/>
           <p:cNvSpPr/>
           <p:nvPr/>
         </p:nvSpPr>
@@ -9766,7 +9836,7 @@
       </p:sp>
       <p:sp>
         <p:nvSpPr>
-          <p:cNvPr id="23" name="TextBox 22"/>
+          <p:cNvPr id="25" name="TextBox 24"/>
           <p:cNvSpPr txBox="1"/>
           <p:nvPr/>
         </p:nvSpPr>
@@ -9807,7 +9877,7 @@
       </p:sp>
       <p:sp>
         <p:nvSpPr>
-          <p:cNvPr id="24" name="Rectangle 23"/>
+          <p:cNvPr id="26" name="Rectangle 25"/>
           <p:cNvSpPr/>
           <p:nvPr/>
         </p:nvSpPr>
@@ -9851,7 +9921,7 @@
       </p:sp>
       <p:sp>
         <p:nvSpPr>
-          <p:cNvPr id="25" name="TextBox 24"/>
+          <p:cNvPr id="27" name="TextBox 26"/>
           <p:cNvSpPr txBox="1"/>
           <p:nvPr/>
         </p:nvSpPr>
